--- a/output/wordlabs-ness-suffix-3day.pptx
+++ b/output/wordlabs-ness-suffix-3day.pptx
@@ -4240,7 +4240,7 @@
                 <a:ea typeface="Calibri" pitchFamily="34" charset="-122"/>
                 <a:cs typeface="Calibri" pitchFamily="34" charset="-120"/>
               </a:rPr>
-              <a:t>"state or quality of"</a:t>
+              <a:t>"state or quality of being"</a:t>
             </a:r>
             <a:endParaRPr lang="en-US" sz="2200" dirty="0"/>
           </a:p>
@@ -5288,7 +5288,7 @@
                 <a:ea typeface="Calibri" pitchFamily="34" charset="-122"/>
                 <a:cs typeface="Calibri" pitchFamily="34" charset="-120"/>
               </a:rPr>
-              <a:t>Word Labs  •  wordlabs.app  •  Suffix: '-ness' = state or quality of</a:t>
+              <a:t>Word Labs  •  wordlabs.app  •  Suffix: '-ness' = state or quality of being</a:t>
             </a:r>
             <a:endParaRPr lang="en-US" sz="800" dirty="0"/>
           </a:p>
@@ -5928,7 +5928,7 @@
                 <a:ea typeface="Calibri" pitchFamily="34" charset="-122"/>
                 <a:cs typeface="Calibri" pitchFamily="34" charset="-120"/>
               </a:rPr>
-              <a:t>Word Labs  •  wordlabs.app  •  Suffix: '-ness' = state or quality of</a:t>
+              <a:t>Word Labs  •  wordlabs.app  •  Suffix: '-ness' = state or quality of being</a:t>
             </a:r>
             <a:endParaRPr lang="en-US" sz="800" dirty="0"/>
           </a:p>
@@ -6057,7 +6057,7 @@
                 <a:ea typeface="Calibri" pitchFamily="34" charset="-122"/>
                 <a:cs typeface="Calibri" pitchFamily="34" charset="-120"/>
               </a:rPr>
-              <a:t>brightness</a:t>
+              <a:t>softness</a:t>
             </a:r>
             <a:pPr algn="l" indent="0" marL="0">
               <a:buNone/>
@@ -6071,7 +6071,7 @@
                 <a:ea typeface="Calibri" pitchFamily="34" charset="-122"/>
                 <a:cs typeface="Calibri" pitchFamily="34" charset="-120"/>
               </a:rPr>
-              <a:t> of the sun and the </a:t>
+              <a:t> of the puppy's fur and its general </a:t>
             </a:r>
             <a:pPr algn="l" indent="0" marL="0">
               <a:buNone/>
@@ -6088,7 +6088,7 @@
                 <a:ea typeface="Calibri" pitchFamily="34" charset="-122"/>
                 <a:cs typeface="Calibri" pitchFamily="34" charset="-120"/>
               </a:rPr>
-              <a:t>stillness</a:t>
+              <a:t>loudness</a:t>
             </a:r>
             <a:pPr algn="l" indent="0" marL="0">
               <a:buNone/>
@@ -6102,7 +6102,7 @@
                 <a:ea typeface="Calibri" pitchFamily="34" charset="-122"/>
                 <a:cs typeface="Calibri" pitchFamily="34" charset="-120"/>
               </a:rPr>
-              <a:t> of the lake made the morning feel magical.</a:t>
+              <a:t> made it a funny pet.</a:t>
             </a:r>
             <a:endParaRPr lang="en-US" sz="1800" dirty="0"/>
           </a:p>
@@ -6257,7 +6257,7 @@
                 <a:ea typeface="Trebuchet MS" pitchFamily="34" charset="-122"/>
                 <a:cs typeface="Trebuchet MS" pitchFamily="34" charset="-120"/>
               </a:rPr>
-              <a:t>brightness</a:t>
+              <a:t>softness</a:t>
             </a:r>
             <a:endParaRPr lang="en-US" sz="1400" dirty="0"/>
           </a:p>
@@ -6385,7 +6385,7 @@
                 <a:ea typeface="Trebuchet MS" pitchFamily="34" charset="-122"/>
                 <a:cs typeface="Trebuchet MS" pitchFamily="34" charset="-120"/>
               </a:rPr>
-              <a:t>stillness</a:t>
+              <a:t>loudness</a:t>
             </a:r>
             <a:endParaRPr lang="en-US" sz="1400" dirty="0"/>
           </a:p>
@@ -6716,7 +6716,7 @@
                 <a:ea typeface="Calibri" pitchFamily="34" charset="-122"/>
                 <a:cs typeface="Calibri" pitchFamily="34" charset="-120"/>
               </a:rPr>
-              <a:t>Word Labs  •  wordlabs.app  •  Suffix: '-ness' = state or quality of</a:t>
+              <a:t>Word Labs  •  wordlabs.app  •  Suffix: '-ness' = state or quality of being</a:t>
             </a:r>
             <a:endParaRPr lang="en-US" sz="800" dirty="0"/>
           </a:p>
@@ -6855,7 +6855,7 @@
                 <a:ea typeface="Trebuchet MS" pitchFamily="34" charset="-122"/>
                 <a:cs typeface="Trebuchet MS" pitchFamily="34" charset="-120"/>
               </a:rPr>
-              <a:t>brightness</a:t>
+              <a:t>softness</a:t>
             </a:r>
             <a:endParaRPr lang="en-US" sz="2800" dirty="0"/>
           </a:p>
@@ -7543,7 +7543,7 @@
                 <a:ea typeface="Calibri" pitchFamily="34" charset="-122"/>
                 <a:cs typeface="Calibri" pitchFamily="34" charset="-120"/>
               </a:rPr>
-              <a:t>Word Labs  •  wordlabs.app  •  Suffix: '-ness' = state or quality of</a:t>
+              <a:t>Word Labs  •  wordlabs.app  •  Suffix: '-ness' = state or quality of being</a:t>
             </a:r>
             <a:endParaRPr lang="en-US" sz="800" dirty="0"/>
           </a:p>
@@ -7682,7 +7682,7 @@
                 <a:ea typeface="Trebuchet MS" pitchFamily="34" charset="-122"/>
                 <a:cs typeface="Trebuchet MS" pitchFamily="34" charset="-120"/>
               </a:rPr>
-              <a:t>brightness</a:t>
+              <a:t>softness</a:t>
             </a:r>
             <a:endParaRPr lang="en-US" sz="2800" dirty="0"/>
           </a:p>
@@ -7821,7 +7821,7 @@
                 <a:ea typeface="Trebuchet MS" pitchFamily="34" charset="-122"/>
                 <a:cs typeface="Trebuchet MS" pitchFamily="34" charset="-120"/>
               </a:rPr>
-              <a:t>bright</a:t>
+              <a:t>soft</a:t>
             </a:r>
             <a:endParaRPr lang="en-US" sz="1300" dirty="0"/>
           </a:p>
@@ -7860,7 +7860,7 @@
                 <a:ea typeface="Calibri" pitchFamily="34" charset="-122"/>
                 <a:cs typeface="Calibri" pitchFamily="34" charset="-120"/>
               </a:rPr>
-              <a:t>giving out strong light</a:t>
+              <a:t>gentle, not hard</a:t>
             </a:r>
             <a:endParaRPr lang="en-US" sz="850" dirty="0"/>
           </a:p>
@@ -7972,7 +7972,7 @@
                 <a:ea typeface="Calibri" pitchFamily="34" charset="-122"/>
                 <a:cs typeface="Calibri" pitchFamily="34" charset="-120"/>
               </a:rPr>
-              <a:t>state or quality of</a:t>
+              <a:t>state or quality of being</a:t>
             </a:r>
             <a:endParaRPr lang="en-US" sz="850" dirty="0"/>
           </a:p>
@@ -8528,7 +8528,7 @@
                 <a:ea typeface="Calibri" pitchFamily="34" charset="-122"/>
                 <a:cs typeface="Calibri" pitchFamily="34" charset="-120"/>
               </a:rPr>
-              <a:t>Word Labs  •  wordlabs.app  •  Suffix: '-ness' = state or quality of</a:t>
+              <a:t>Word Labs  •  wordlabs.app  •  Suffix: '-ness' = state or quality of being</a:t>
             </a:r>
             <a:endParaRPr lang="en-US" sz="800" dirty="0"/>
           </a:p>
@@ -8667,7 +8667,7 @@
                 <a:ea typeface="Trebuchet MS" pitchFamily="34" charset="-122"/>
                 <a:cs typeface="Trebuchet MS" pitchFamily="34" charset="-120"/>
               </a:rPr>
-              <a:t>brightness</a:t>
+              <a:t>softness</a:t>
             </a:r>
             <a:endParaRPr lang="en-US" sz="2800" dirty="0"/>
           </a:p>
@@ -8806,7 +8806,7 @@
                 <a:ea typeface="Trebuchet MS" pitchFamily="34" charset="-122"/>
                 <a:cs typeface="Trebuchet MS" pitchFamily="34" charset="-120"/>
               </a:rPr>
-              <a:t>bright</a:t>
+              <a:t>soft</a:t>
             </a:r>
             <a:endParaRPr lang="en-US" sz="1300" dirty="0"/>
           </a:p>
@@ -8845,7 +8845,7 @@
                 <a:ea typeface="Calibri" pitchFamily="34" charset="-122"/>
                 <a:cs typeface="Calibri" pitchFamily="34" charset="-120"/>
               </a:rPr>
-              <a:t>giving out strong light</a:t>
+              <a:t>gentle, not hard</a:t>
             </a:r>
             <a:endParaRPr lang="en-US" sz="850" dirty="0"/>
           </a:p>
@@ -8957,7 +8957,7 @@
                 <a:ea typeface="Calibri" pitchFamily="34" charset="-122"/>
                 <a:cs typeface="Calibri" pitchFamily="34" charset="-120"/>
               </a:rPr>
-              <a:t>state or quality of</a:t>
+              <a:t>state or quality of being</a:t>
             </a:r>
             <a:endParaRPr lang="en-US" sz="850" dirty="0"/>
           </a:p>
@@ -9116,7 +9116,7 @@
                 <a:ea typeface="Trebuchet MS" pitchFamily="34" charset="-122"/>
                 <a:cs typeface="Trebuchet MS" pitchFamily="34" charset="-120"/>
               </a:rPr>
-              <a:t>bright</a:t>
+              <a:t>soft</a:t>
             </a:r>
             <a:endParaRPr lang="en-US" sz="1400" dirty="0"/>
           </a:p>
@@ -9645,7 +9645,7 @@
                 <a:ea typeface="Calibri" pitchFamily="34" charset="-122"/>
                 <a:cs typeface="Calibri" pitchFamily="34" charset="-120"/>
               </a:rPr>
-              <a:t>Word Labs  •  wordlabs.app  •  Suffix: '-ness' = state or quality of</a:t>
+              <a:t>Word Labs  •  wordlabs.app  •  Suffix: '-ness' = state or quality of being</a:t>
             </a:r>
             <a:endParaRPr lang="en-US" sz="800" dirty="0"/>
           </a:p>
@@ -9784,7 +9784,7 @@
                 <a:ea typeface="Trebuchet MS" pitchFamily="34" charset="-122"/>
                 <a:cs typeface="Trebuchet MS" pitchFamily="34" charset="-120"/>
               </a:rPr>
-              <a:t>brightness</a:t>
+              <a:t>softness</a:t>
             </a:r>
             <a:endParaRPr lang="en-US" sz="2800" dirty="0"/>
           </a:p>
@@ -9923,7 +9923,7 @@
                 <a:ea typeface="Trebuchet MS" pitchFamily="34" charset="-122"/>
                 <a:cs typeface="Trebuchet MS" pitchFamily="34" charset="-120"/>
               </a:rPr>
-              <a:t>bright</a:t>
+              <a:t>soft</a:t>
             </a:r>
             <a:endParaRPr lang="en-US" sz="1300" dirty="0"/>
           </a:p>
@@ -9962,7 +9962,7 @@
                 <a:ea typeface="Calibri" pitchFamily="34" charset="-122"/>
                 <a:cs typeface="Calibri" pitchFamily="34" charset="-120"/>
               </a:rPr>
-              <a:t>giving out strong light</a:t>
+              <a:t>gentle, not hard</a:t>
             </a:r>
             <a:endParaRPr lang="en-US" sz="850" dirty="0"/>
           </a:p>
@@ -10074,7 +10074,7 @@
                 <a:ea typeface="Calibri" pitchFamily="34" charset="-122"/>
                 <a:cs typeface="Calibri" pitchFamily="34" charset="-120"/>
               </a:rPr>
-              <a:t>state or quality of</a:t>
+              <a:t>state or quality of being</a:t>
             </a:r>
             <a:endParaRPr lang="en-US" sz="850" dirty="0"/>
           </a:p>
@@ -10233,7 +10233,7 @@
                 <a:ea typeface="Trebuchet MS" pitchFamily="34" charset="-122"/>
                 <a:cs typeface="Trebuchet MS" pitchFamily="34" charset="-120"/>
               </a:rPr>
-              <a:t>bright</a:t>
+              <a:t>soft</a:t>
             </a:r>
             <a:endParaRPr lang="en-US" sz="1400" dirty="0"/>
           </a:p>
@@ -10419,11 +10419,11 @@
         <p:spPr>
           <a:xfrm>
             <a:off x="1874520" y="4096512"/>
-            <a:ext cx="6903720" cy="804672"/>
+            <a:ext cx="6903720" cy="658368"/>
           </a:xfrm>
           <a:prstGeom prst="rect">
             <a:avLst>
-              <a:gd name="adj" fmla="val 6818"/>
+              <a:gd name="adj" fmla="val 8333"/>
             </a:avLst>
           </a:prstGeom>
           <a:solidFill>
@@ -10445,12 +10445,12 @@
         </p:nvSpPr>
         <p:spPr>
           <a:xfrm>
-            <a:off x="2254649" y="4169664"/>
-            <a:ext cx="685800" cy="384048"/>
+            <a:off x="2124837" y="4169664"/>
+            <a:ext cx="685800" cy="475488"/>
           </a:xfrm>
           <a:prstGeom prst="rect">
             <a:avLst>
-              <a:gd name="adj" fmla="val 9524"/>
+              <a:gd name="adj" fmla="val 7692"/>
             </a:avLst>
           </a:prstGeom>
           <a:solidFill>
@@ -10472,8 +10472,8 @@
         </p:nvSpPr>
         <p:spPr>
           <a:xfrm>
-            <a:off x="2254649" y="4169664"/>
-            <a:ext cx="685800" cy="384048"/>
+            <a:off x="2124837" y="4169664"/>
+            <a:ext cx="685800" cy="475488"/>
           </a:xfrm>
           <a:prstGeom prst="rect">
             <a:avLst/>
@@ -10497,7 +10497,7 @@
                 <a:ea typeface="Trebuchet MS" pitchFamily="34" charset="-122"/>
                 <a:cs typeface="Trebuchet MS" pitchFamily="34" charset="-120"/>
               </a:rPr>
-              <a:t>br</a:t>
+              <a:t>s</a:t>
             </a:r>
             <a:endParaRPr lang="en-US" sz="900" dirty="0"/>
           </a:p>
@@ -10511,12 +10511,12 @@
         </p:nvSpPr>
         <p:spPr>
           <a:xfrm>
-            <a:off x="3293146" y="4169664"/>
-            <a:ext cx="685800" cy="384048"/>
+            <a:off x="3033522" y="4169664"/>
+            <a:ext cx="685800" cy="475488"/>
           </a:xfrm>
           <a:prstGeom prst="rect">
             <a:avLst>
-              <a:gd name="adj" fmla="val 9524"/>
+              <a:gd name="adj" fmla="val 7692"/>
             </a:avLst>
           </a:prstGeom>
           <a:solidFill>
@@ -10538,8 +10538,8 @@
         </p:nvSpPr>
         <p:spPr>
           <a:xfrm>
-            <a:off x="3293146" y="4169664"/>
-            <a:ext cx="685800" cy="384048"/>
+            <a:off x="3033522" y="4169664"/>
+            <a:ext cx="685800" cy="475488"/>
           </a:xfrm>
           <a:prstGeom prst="rect">
             <a:avLst/>
@@ -10563,7 +10563,7 @@
                 <a:ea typeface="Trebuchet MS" pitchFamily="34" charset="-122"/>
                 <a:cs typeface="Trebuchet MS" pitchFamily="34" charset="-120"/>
               </a:rPr>
-              <a:t>igh</a:t>
+              <a:t>o</a:t>
             </a:r>
             <a:endParaRPr lang="en-US" sz="900" dirty="0"/>
           </a:p>
@@ -10571,57 +10571,18 @@
       </p:sp>
       <p:sp>
         <p:nvSpPr>
-          <p:cNvPr id="37" name="Text 35"/>
-          <p:cNvSpPr/>
-          <p:nvPr/>
-        </p:nvSpPr>
-        <p:spPr>
-          <a:xfrm>
-            <a:off x="3293146" y="4572000"/>
-            <a:ext cx="685800" cy="219456"/>
-          </a:xfrm>
-          <a:prstGeom prst="rect">
-            <a:avLst/>
-          </a:prstGeom>
-          <a:noFill/>
-          <a:ln/>
-        </p:spPr>
-        <p:txBody>
-          <a:bodyPr wrap="square" lIns="0" tIns="0" rIns="0" bIns="0" rtlCol="0" anchor="t"/>
-          <a:lstStyle/>
-          <a:p>
-            <a:pPr algn="ctr" indent="0" marL="0">
-              <a:buNone/>
-            </a:pPr>
-            <a:r>
-              <a:rPr lang="en-US" sz="750" i="1" dirty="0">
-                <a:solidFill>
-                  <a:srgbClr val="94A3B8"/>
-                </a:solidFill>
-                <a:latin typeface="Calibri" pitchFamily="34" charset="0"/>
-                <a:ea typeface="Calibri" pitchFamily="34" charset="-122"/>
-                <a:cs typeface="Calibri" pitchFamily="34" charset="-120"/>
-              </a:rPr>
-              <a:t>/ie/</a:t>
-            </a:r>
-            <a:endParaRPr lang="en-US" sz="750" dirty="0"/>
-          </a:p>
-        </p:txBody>
-      </p:sp>
-      <p:sp>
-        <p:nvSpPr>
-          <p:cNvPr id="38" name="Shape 36"/>
-          <p:cNvSpPr/>
-          <p:nvPr/>
-        </p:nvSpPr>
-        <p:spPr>
-          <a:xfrm>
-            <a:off x="4331643" y="4169664"/>
-            <a:ext cx="685800" cy="384048"/>
+          <p:cNvPr id="37" name="Shape 35"/>
+          <p:cNvSpPr/>
+          <p:nvPr/>
+        </p:nvSpPr>
+        <p:spPr>
+          <a:xfrm>
+            <a:off x="3942207" y="4169664"/>
+            <a:ext cx="685800" cy="475488"/>
           </a:xfrm>
           <a:prstGeom prst="rect">
             <a:avLst>
-              <a:gd name="adj" fmla="val 9524"/>
+              <a:gd name="adj" fmla="val 7692"/>
             </a:avLst>
           </a:prstGeom>
           <a:solidFill>
@@ -10637,14 +10598,14 @@
       </p:sp>
       <p:sp>
         <p:nvSpPr>
-          <p:cNvPr id="39" name="Text 37"/>
-          <p:cNvSpPr/>
-          <p:nvPr/>
-        </p:nvSpPr>
-        <p:spPr>
-          <a:xfrm>
-            <a:off x="4331643" y="4169664"/>
-            <a:ext cx="685800" cy="384048"/>
+          <p:cNvPr id="38" name="Text 36"/>
+          <p:cNvSpPr/>
+          <p:nvPr/>
+        </p:nvSpPr>
+        <p:spPr>
+          <a:xfrm>
+            <a:off x="3942207" y="4169664"/>
+            <a:ext cx="685800" cy="475488"/>
           </a:xfrm>
           <a:prstGeom prst="rect">
             <a:avLst/>
@@ -10668,7 +10629,7 @@
                 <a:ea typeface="Trebuchet MS" pitchFamily="34" charset="-122"/>
                 <a:cs typeface="Trebuchet MS" pitchFamily="34" charset="-120"/>
               </a:rPr>
-              <a:t>t</a:t>
+              <a:t>f</a:t>
             </a:r>
             <a:endParaRPr lang="en-US" sz="900" dirty="0"/>
           </a:p>
@@ -10676,18 +10637,18 @@
       </p:sp>
       <p:sp>
         <p:nvSpPr>
-          <p:cNvPr id="40" name="Shape 38"/>
-          <p:cNvSpPr/>
-          <p:nvPr/>
-        </p:nvSpPr>
-        <p:spPr>
-          <a:xfrm>
-            <a:off x="5370141" y="4169664"/>
-            <a:ext cx="685800" cy="384048"/>
+          <p:cNvPr id="39" name="Shape 37"/>
+          <p:cNvSpPr/>
+          <p:nvPr/>
+        </p:nvSpPr>
+        <p:spPr>
+          <a:xfrm>
+            <a:off x="4850892" y="4169664"/>
+            <a:ext cx="685800" cy="475488"/>
           </a:xfrm>
           <a:prstGeom prst="rect">
             <a:avLst>
-              <a:gd name="adj" fmla="val 9524"/>
+              <a:gd name="adj" fmla="val 7692"/>
             </a:avLst>
           </a:prstGeom>
           <a:solidFill>
@@ -10703,14 +10664,14 @@
       </p:sp>
       <p:sp>
         <p:nvSpPr>
-          <p:cNvPr id="41" name="Text 39"/>
-          <p:cNvSpPr/>
-          <p:nvPr/>
-        </p:nvSpPr>
-        <p:spPr>
-          <a:xfrm>
-            <a:off x="5370141" y="4169664"/>
-            <a:ext cx="685800" cy="384048"/>
+          <p:cNvPr id="40" name="Text 38"/>
+          <p:cNvSpPr/>
+          <p:nvPr/>
+        </p:nvSpPr>
+        <p:spPr>
+          <a:xfrm>
+            <a:off x="4850892" y="4169664"/>
+            <a:ext cx="685800" cy="475488"/>
           </a:xfrm>
           <a:prstGeom prst="rect">
             <a:avLst/>
@@ -10734,7 +10695,7 @@
                 <a:ea typeface="Trebuchet MS" pitchFamily="34" charset="-122"/>
                 <a:cs typeface="Trebuchet MS" pitchFamily="34" charset="-120"/>
               </a:rPr>
-              <a:t>n</a:t>
+              <a:t>t</a:t>
             </a:r>
             <a:endParaRPr lang="en-US" sz="900" dirty="0"/>
           </a:p>
@@ -10742,18 +10703,18 @@
       </p:sp>
       <p:sp>
         <p:nvSpPr>
-          <p:cNvPr id="42" name="Shape 40"/>
-          <p:cNvSpPr/>
-          <p:nvPr/>
-        </p:nvSpPr>
-        <p:spPr>
-          <a:xfrm>
-            <a:off x="6408638" y="4169664"/>
-            <a:ext cx="685800" cy="384048"/>
+          <p:cNvPr id="41" name="Shape 39"/>
+          <p:cNvSpPr/>
+          <p:nvPr/>
+        </p:nvSpPr>
+        <p:spPr>
+          <a:xfrm>
+            <a:off x="5759577" y="4169664"/>
+            <a:ext cx="685800" cy="475488"/>
           </a:xfrm>
           <a:prstGeom prst="rect">
             <a:avLst>
-              <a:gd name="adj" fmla="val 9524"/>
+              <a:gd name="adj" fmla="val 7692"/>
             </a:avLst>
           </a:prstGeom>
           <a:solidFill>
@@ -10769,14 +10730,14 @@
       </p:sp>
       <p:sp>
         <p:nvSpPr>
-          <p:cNvPr id="43" name="Text 41"/>
-          <p:cNvSpPr/>
-          <p:nvPr/>
-        </p:nvSpPr>
-        <p:spPr>
-          <a:xfrm>
-            <a:off x="6408638" y="4169664"/>
-            <a:ext cx="685800" cy="384048"/>
+          <p:cNvPr id="42" name="Text 40"/>
+          <p:cNvSpPr/>
+          <p:nvPr/>
+        </p:nvSpPr>
+        <p:spPr>
+          <a:xfrm>
+            <a:off x="5759577" y="4169664"/>
+            <a:ext cx="685800" cy="475488"/>
           </a:xfrm>
           <a:prstGeom prst="rect">
             <a:avLst/>
@@ -10800,7 +10761,7 @@
                 <a:ea typeface="Trebuchet MS" pitchFamily="34" charset="-122"/>
                 <a:cs typeface="Trebuchet MS" pitchFamily="34" charset="-120"/>
               </a:rPr>
-              <a:t>e</a:t>
+              <a:t>n</a:t>
             </a:r>
             <a:endParaRPr lang="en-US" sz="900" dirty="0"/>
           </a:p>
@@ -10808,18 +10769,18 @@
       </p:sp>
       <p:sp>
         <p:nvSpPr>
-          <p:cNvPr id="44" name="Shape 42"/>
-          <p:cNvSpPr/>
-          <p:nvPr/>
-        </p:nvSpPr>
-        <p:spPr>
-          <a:xfrm>
-            <a:off x="7447135" y="4169664"/>
-            <a:ext cx="685800" cy="384048"/>
+          <p:cNvPr id="43" name="Shape 41"/>
+          <p:cNvSpPr/>
+          <p:nvPr/>
+        </p:nvSpPr>
+        <p:spPr>
+          <a:xfrm>
+            <a:off x="6668262" y="4169664"/>
+            <a:ext cx="685800" cy="475488"/>
           </a:xfrm>
           <a:prstGeom prst="rect">
             <a:avLst>
-              <a:gd name="adj" fmla="val 9524"/>
+              <a:gd name="adj" fmla="val 7692"/>
             </a:avLst>
           </a:prstGeom>
           <a:solidFill>
@@ -10835,14 +10796,14 @@
       </p:sp>
       <p:sp>
         <p:nvSpPr>
-          <p:cNvPr id="45" name="Text 43"/>
-          <p:cNvSpPr/>
-          <p:nvPr/>
-        </p:nvSpPr>
-        <p:spPr>
-          <a:xfrm>
-            <a:off x="7447135" y="4169664"/>
-            <a:ext cx="685800" cy="384048"/>
+          <p:cNvPr id="44" name="Text 42"/>
+          <p:cNvSpPr/>
+          <p:nvPr/>
+        </p:nvSpPr>
+        <p:spPr>
+          <a:xfrm>
+            <a:off x="6668262" y="4169664"/>
+            <a:ext cx="685800" cy="475488"/>
           </a:xfrm>
           <a:prstGeom prst="rect">
             <a:avLst/>
@@ -10866,48 +10827,75 @@
                 <a:ea typeface="Trebuchet MS" pitchFamily="34" charset="-122"/>
                 <a:cs typeface="Trebuchet MS" pitchFamily="34" charset="-120"/>
               </a:rPr>
+              <a:t>e</a:t>
+            </a:r>
+            <a:endParaRPr lang="en-US" sz="900" dirty="0"/>
+          </a:p>
+        </p:txBody>
+      </p:sp>
+      <p:sp>
+        <p:nvSpPr>
+          <p:cNvPr id="45" name="Shape 43"/>
+          <p:cNvSpPr/>
+          <p:nvPr/>
+        </p:nvSpPr>
+        <p:spPr>
+          <a:xfrm>
+            <a:off x="7576947" y="4169664"/>
+            <a:ext cx="685800" cy="475488"/>
+          </a:xfrm>
+          <a:prstGeom prst="rect">
+            <a:avLst>
+              <a:gd name="adj" fmla="val 7692"/>
+            </a:avLst>
+          </a:prstGeom>
+          <a:solidFill>
+            <a:srgbClr val="FFFFFF"/>
+          </a:solidFill>
+          <a:ln w="12700">
+            <a:solidFill>
+              <a:srgbClr val="DB2777"/>
+            </a:solidFill>
+            <a:prstDash val="solid"/>
+          </a:ln>
+        </p:spPr>
+      </p:sp>
+      <p:sp>
+        <p:nvSpPr>
+          <p:cNvPr id="46" name="Text 44"/>
+          <p:cNvSpPr/>
+          <p:nvPr/>
+        </p:nvSpPr>
+        <p:spPr>
+          <a:xfrm>
+            <a:off x="7576947" y="4169664"/>
+            <a:ext cx="685800" cy="475488"/>
+          </a:xfrm>
+          <a:prstGeom prst="rect">
+            <a:avLst/>
+          </a:prstGeom>
+          <a:noFill/>
+          <a:ln/>
+        </p:spPr>
+        <p:txBody>
+          <a:bodyPr wrap="square" lIns="0" tIns="0" rIns="0" bIns="0" rtlCol="0" anchor="ctr"/>
+          <a:lstStyle/>
+          <a:p>
+            <a:pPr algn="ctr" indent="0" marL="0">
+              <a:buNone/>
+            </a:pPr>
+            <a:r>
+              <a:rPr lang="en-US" sz="900" b="1" dirty="0">
+                <a:solidFill>
+                  <a:srgbClr val="9D174D"/>
+                </a:solidFill>
+                <a:latin typeface="Trebuchet MS" pitchFamily="34" charset="0"/>
+                <a:ea typeface="Trebuchet MS" pitchFamily="34" charset="-122"/>
+                <a:cs typeface="Trebuchet MS" pitchFamily="34" charset="-120"/>
+              </a:rPr>
               <a:t>ss</a:t>
             </a:r>
             <a:endParaRPr lang="en-US" sz="900" dirty="0"/>
-          </a:p>
-        </p:txBody>
-      </p:sp>
-      <p:sp>
-        <p:nvSpPr>
-          <p:cNvPr id="46" name="Text 44"/>
-          <p:cNvSpPr/>
-          <p:nvPr/>
-        </p:nvSpPr>
-        <p:spPr>
-          <a:xfrm>
-            <a:off x="7447135" y="4572000"/>
-            <a:ext cx="685800" cy="219456"/>
-          </a:xfrm>
-          <a:prstGeom prst="rect">
-            <a:avLst/>
-          </a:prstGeom>
-          <a:noFill/>
-          <a:ln/>
-        </p:spPr>
-        <p:txBody>
-          <a:bodyPr wrap="square" lIns="0" tIns="0" rIns="0" bIns="0" rtlCol="0" anchor="t"/>
-          <a:lstStyle/>
-          <a:p>
-            <a:pPr algn="ctr" indent="0" marL="0">
-              <a:buNone/>
-            </a:pPr>
-            <a:r>
-              <a:rPr lang="en-US" sz="750" i="1" dirty="0">
-                <a:solidFill>
-                  <a:srgbClr val="94A3B8"/>
-                </a:solidFill>
-                <a:latin typeface="Calibri" pitchFamily="34" charset="0"/>
-                <a:ea typeface="Calibri" pitchFamily="34" charset="-122"/>
-                <a:cs typeface="Calibri" pitchFamily="34" charset="-120"/>
-              </a:rPr>
-              <a:t>/s/</a:t>
-            </a:r>
-            <a:endParaRPr lang="en-US" sz="750" dirty="0"/>
           </a:p>
         </p:txBody>
       </p:sp>
@@ -11197,7 +11185,7 @@
                 <a:ea typeface="Calibri" pitchFamily="34" charset="-122"/>
                 <a:cs typeface="Calibri" pitchFamily="34" charset="-120"/>
               </a:rPr>
-              <a:t>Word Labs  •  wordlabs.app  •  Suffix: '-ness' = state or quality of</a:t>
+              <a:t>Word Labs  •  wordlabs.app  •  Suffix: '-ness' = state or quality of being</a:t>
             </a:r>
             <a:endParaRPr lang="en-US" sz="800" dirty="0"/>
           </a:p>
@@ -11336,7 +11324,7 @@
                 <a:ea typeface="Trebuchet MS" pitchFamily="34" charset="-122"/>
                 <a:cs typeface="Trebuchet MS" pitchFamily="34" charset="-120"/>
               </a:rPr>
-              <a:t>stillness</a:t>
+              <a:t>loudness</a:t>
             </a:r>
             <a:endParaRPr lang="en-US" sz="2800" dirty="0"/>
           </a:p>
@@ -12024,7 +12012,7 @@
                 <a:ea typeface="Calibri" pitchFamily="34" charset="-122"/>
                 <a:cs typeface="Calibri" pitchFamily="34" charset="-120"/>
               </a:rPr>
-              <a:t>Word Labs  •  wordlabs.app  •  Suffix: '-ness' = state or quality of</a:t>
+              <a:t>Word Labs  •  wordlabs.app  •  Suffix: '-ness' = state or quality of being</a:t>
             </a:r>
             <a:endParaRPr lang="en-US" sz="800" dirty="0"/>
           </a:p>
@@ -12163,7 +12151,7 @@
                 <a:ea typeface="Trebuchet MS" pitchFamily="34" charset="-122"/>
                 <a:cs typeface="Trebuchet MS" pitchFamily="34" charset="-120"/>
               </a:rPr>
-              <a:t>stillness</a:t>
+              <a:t>loudness</a:t>
             </a:r>
             <a:endParaRPr lang="en-US" sz="2800" dirty="0"/>
           </a:p>
@@ -12302,7 +12290,7 @@
                 <a:ea typeface="Trebuchet MS" pitchFamily="34" charset="-122"/>
                 <a:cs typeface="Trebuchet MS" pitchFamily="34" charset="-120"/>
               </a:rPr>
-              <a:t>still</a:t>
+              <a:t>loud</a:t>
             </a:r>
             <a:endParaRPr lang="en-US" sz="1300" dirty="0"/>
           </a:p>
@@ -12341,7 +12329,7 @@
                 <a:ea typeface="Calibri" pitchFamily="34" charset="-122"/>
                 <a:cs typeface="Calibri" pitchFamily="34" charset="-120"/>
               </a:rPr>
-              <a:t>not moving or quiet</a:t>
+              <a:t>making a lot of noise</a:t>
             </a:r>
             <a:endParaRPr lang="en-US" sz="850" dirty="0"/>
           </a:p>
@@ -12453,7 +12441,7 @@
                 <a:ea typeface="Calibri" pitchFamily="34" charset="-122"/>
                 <a:cs typeface="Calibri" pitchFamily="34" charset="-120"/>
               </a:rPr>
-              <a:t>state or quality of</a:t>
+              <a:t>state or quality of being</a:t>
             </a:r>
             <a:endParaRPr lang="en-US" sz="850" dirty="0"/>
           </a:p>
@@ -13009,7 +12997,7 @@
                 <a:ea typeface="Calibri" pitchFamily="34" charset="-122"/>
                 <a:cs typeface="Calibri" pitchFamily="34" charset="-120"/>
               </a:rPr>
-              <a:t>Word Labs  •  wordlabs.app  •  Suffix: '-ness' = state or quality of</a:t>
+              <a:t>Word Labs  •  wordlabs.app  •  Suffix: '-ness' = state or quality of being</a:t>
             </a:r>
             <a:endParaRPr lang="en-US" sz="800" dirty="0"/>
           </a:p>
@@ -13148,7 +13136,7 @@
                 <a:ea typeface="Trebuchet MS" pitchFamily="34" charset="-122"/>
                 <a:cs typeface="Trebuchet MS" pitchFamily="34" charset="-120"/>
               </a:rPr>
-              <a:t>stillness</a:t>
+              <a:t>loudness</a:t>
             </a:r>
             <a:endParaRPr lang="en-US" sz="2800" dirty="0"/>
           </a:p>
@@ -13287,7 +13275,7 @@
                 <a:ea typeface="Trebuchet MS" pitchFamily="34" charset="-122"/>
                 <a:cs typeface="Trebuchet MS" pitchFamily="34" charset="-120"/>
               </a:rPr>
-              <a:t>still</a:t>
+              <a:t>loud</a:t>
             </a:r>
             <a:endParaRPr lang="en-US" sz="1300" dirty="0"/>
           </a:p>
@@ -13326,7 +13314,7 @@
                 <a:ea typeface="Calibri" pitchFamily="34" charset="-122"/>
                 <a:cs typeface="Calibri" pitchFamily="34" charset="-120"/>
               </a:rPr>
-              <a:t>not moving or quiet</a:t>
+              <a:t>making a lot of noise</a:t>
             </a:r>
             <a:endParaRPr lang="en-US" sz="850" dirty="0"/>
           </a:p>
@@ -13438,7 +13426,7 @@
                 <a:ea typeface="Calibri" pitchFamily="34" charset="-122"/>
                 <a:cs typeface="Calibri" pitchFamily="34" charset="-120"/>
               </a:rPr>
-              <a:t>state or quality of</a:t>
+              <a:t>state or quality of being</a:t>
             </a:r>
             <a:endParaRPr lang="en-US" sz="850" dirty="0"/>
           </a:p>
@@ -13597,7 +13585,7 @@
                 <a:ea typeface="Trebuchet MS" pitchFamily="34" charset="-122"/>
                 <a:cs typeface="Trebuchet MS" pitchFamily="34" charset="-120"/>
               </a:rPr>
-              <a:t>still</a:t>
+              <a:t>loud</a:t>
             </a:r>
             <a:endParaRPr lang="en-US" sz="1400" dirty="0"/>
           </a:p>
@@ -14035,7 +14023,7 @@
                 <a:ea typeface="Calibri" pitchFamily="34" charset="-122"/>
                 <a:cs typeface="Calibri" pitchFamily="34" charset="-120"/>
               </a:rPr>
-              <a:t>Suffix '-ness' — state or quality of</a:t>
+              <a:t>Suffix '-ness' — state or quality of being</a:t>
             </a:r>
             <a:endParaRPr lang="en-US" sz="1600" dirty="0"/>
           </a:p>
@@ -14391,7 +14379,7 @@
                 <a:ea typeface="Calibri" pitchFamily="34" charset="-122"/>
                 <a:cs typeface="Calibri" pitchFamily="34" charset="-120"/>
               </a:rPr>
-              <a:t>Word Labs  •  wordlabs.app  •  Suffix: '-ness' = state or quality of</a:t>
+              <a:t>Word Labs  •  wordlabs.app  •  Suffix: '-ness' = state or quality of being</a:t>
             </a:r>
             <a:endParaRPr lang="en-US" sz="800" dirty="0"/>
           </a:p>
@@ -14530,7 +14518,7 @@
                 <a:ea typeface="Trebuchet MS" pitchFamily="34" charset="-122"/>
                 <a:cs typeface="Trebuchet MS" pitchFamily="34" charset="-120"/>
               </a:rPr>
-              <a:t>stillness</a:t>
+              <a:t>loudness</a:t>
             </a:r>
             <a:endParaRPr lang="en-US" sz="2800" dirty="0"/>
           </a:p>
@@ -14669,7 +14657,7 @@
                 <a:ea typeface="Trebuchet MS" pitchFamily="34" charset="-122"/>
                 <a:cs typeface="Trebuchet MS" pitchFamily="34" charset="-120"/>
               </a:rPr>
-              <a:t>still</a:t>
+              <a:t>loud</a:t>
             </a:r>
             <a:endParaRPr lang="en-US" sz="1300" dirty="0"/>
           </a:p>
@@ -14708,7 +14696,7 @@
                 <a:ea typeface="Calibri" pitchFamily="34" charset="-122"/>
                 <a:cs typeface="Calibri" pitchFamily="34" charset="-120"/>
               </a:rPr>
-              <a:t>not moving or quiet</a:t>
+              <a:t>making a lot of noise</a:t>
             </a:r>
             <a:endParaRPr lang="en-US" sz="850" dirty="0"/>
           </a:p>
@@ -14820,7 +14808,7 @@
                 <a:ea typeface="Calibri" pitchFamily="34" charset="-122"/>
                 <a:cs typeface="Calibri" pitchFamily="34" charset="-120"/>
               </a:rPr>
-              <a:t>state or quality of</a:t>
+              <a:t>state or quality of being</a:t>
             </a:r>
             <a:endParaRPr lang="en-US" sz="850" dirty="0"/>
           </a:p>
@@ -14979,7 +14967,7 @@
                 <a:ea typeface="Trebuchet MS" pitchFamily="34" charset="-122"/>
                 <a:cs typeface="Trebuchet MS" pitchFamily="34" charset="-120"/>
               </a:rPr>
-              <a:t>still</a:t>
+              <a:t>loud</a:t>
             </a:r>
             <a:endParaRPr lang="en-US" sz="1400" dirty="0"/>
           </a:p>
@@ -15165,11 +15153,11 @@
         <p:spPr>
           <a:xfrm>
             <a:off x="1874520" y="4096512"/>
-            <a:ext cx="6903720" cy="804672"/>
+            <a:ext cx="6903720" cy="658368"/>
           </a:xfrm>
           <a:prstGeom prst="rect">
             <a:avLst>
-              <a:gd name="adj" fmla="val 6818"/>
+              <a:gd name="adj" fmla="val 8333"/>
             </a:avLst>
           </a:prstGeom>
           <a:solidFill>
@@ -15191,12 +15179,12 @@
         </p:nvSpPr>
         <p:spPr>
           <a:xfrm>
-            <a:off x="2124837" y="4169664"/>
-            <a:ext cx="685800" cy="384048"/>
+            <a:off x="2254649" y="4169664"/>
+            <a:ext cx="685800" cy="475488"/>
           </a:xfrm>
           <a:prstGeom prst="rect">
             <a:avLst>
-              <a:gd name="adj" fmla="val 9524"/>
+              <a:gd name="adj" fmla="val 7692"/>
             </a:avLst>
           </a:prstGeom>
           <a:solidFill>
@@ -15218,8 +15206,8 @@
         </p:nvSpPr>
         <p:spPr>
           <a:xfrm>
-            <a:off x="2124837" y="4169664"/>
-            <a:ext cx="685800" cy="384048"/>
+            <a:off x="2254649" y="4169664"/>
+            <a:ext cx="685800" cy="475488"/>
           </a:xfrm>
           <a:prstGeom prst="rect">
             <a:avLst/>
@@ -15243,7 +15231,7 @@
                 <a:ea typeface="Trebuchet MS" pitchFamily="34" charset="-122"/>
                 <a:cs typeface="Trebuchet MS" pitchFamily="34" charset="-120"/>
               </a:rPr>
-              <a:t>s</a:t>
+              <a:t>l</a:t>
             </a:r>
             <a:endParaRPr lang="en-US" sz="900" dirty="0"/>
           </a:p>
@@ -15257,12 +15245,12 @@
         </p:nvSpPr>
         <p:spPr>
           <a:xfrm>
-            <a:off x="3033522" y="4169664"/>
-            <a:ext cx="685800" cy="384048"/>
+            <a:off x="3293146" y="4169664"/>
+            <a:ext cx="685800" cy="475488"/>
           </a:xfrm>
           <a:prstGeom prst="rect">
             <a:avLst>
-              <a:gd name="adj" fmla="val 9524"/>
+              <a:gd name="adj" fmla="val 7692"/>
             </a:avLst>
           </a:prstGeom>
           <a:solidFill>
@@ -15284,8 +15272,8 @@
         </p:nvSpPr>
         <p:spPr>
           <a:xfrm>
-            <a:off x="3033522" y="4169664"/>
-            <a:ext cx="685800" cy="384048"/>
+            <a:off x="3293146" y="4169664"/>
+            <a:ext cx="685800" cy="475488"/>
           </a:xfrm>
           <a:prstGeom prst="rect">
             <a:avLst/>
@@ -15309,7 +15297,7 @@
                 <a:ea typeface="Trebuchet MS" pitchFamily="34" charset="-122"/>
                 <a:cs typeface="Trebuchet MS" pitchFamily="34" charset="-120"/>
               </a:rPr>
-              <a:t>t</a:t>
+              <a:t>ou</a:t>
             </a:r>
             <a:endParaRPr lang="en-US" sz="900" dirty="0"/>
           </a:p>
@@ -15323,12 +15311,12 @@
         </p:nvSpPr>
         <p:spPr>
           <a:xfrm>
-            <a:off x="3942207" y="4169664"/>
-            <a:ext cx="685800" cy="384048"/>
+            <a:off x="4331643" y="4169664"/>
+            <a:ext cx="685800" cy="475488"/>
           </a:xfrm>
           <a:prstGeom prst="rect">
             <a:avLst>
-              <a:gd name="adj" fmla="val 9524"/>
+              <a:gd name="adj" fmla="val 7692"/>
             </a:avLst>
           </a:prstGeom>
           <a:solidFill>
@@ -15350,8 +15338,8 @@
         </p:nvSpPr>
         <p:spPr>
           <a:xfrm>
-            <a:off x="3942207" y="4169664"/>
-            <a:ext cx="685800" cy="384048"/>
+            <a:off x="4331643" y="4169664"/>
+            <a:ext cx="685800" cy="475488"/>
           </a:xfrm>
           <a:prstGeom prst="rect">
             <a:avLst/>
@@ -15375,7 +15363,7 @@
                 <a:ea typeface="Trebuchet MS" pitchFamily="34" charset="-122"/>
                 <a:cs typeface="Trebuchet MS" pitchFamily="34" charset="-120"/>
               </a:rPr>
-              <a:t>i</a:t>
+              <a:t>d</a:t>
             </a:r>
             <a:endParaRPr lang="en-US" sz="900" dirty="0"/>
           </a:p>
@@ -15389,12 +15377,12 @@
         </p:nvSpPr>
         <p:spPr>
           <a:xfrm>
-            <a:off x="4850892" y="4169664"/>
-            <a:ext cx="685800" cy="384048"/>
+            <a:off x="5370141" y="4169664"/>
+            <a:ext cx="685800" cy="475488"/>
           </a:xfrm>
           <a:prstGeom prst="rect">
             <a:avLst>
-              <a:gd name="adj" fmla="val 9524"/>
+              <a:gd name="adj" fmla="val 7692"/>
             </a:avLst>
           </a:prstGeom>
           <a:solidFill>
@@ -15416,8 +15404,8 @@
         </p:nvSpPr>
         <p:spPr>
           <a:xfrm>
-            <a:off x="4850892" y="4169664"/>
-            <a:ext cx="685800" cy="384048"/>
+            <a:off x="5370141" y="4169664"/>
+            <a:ext cx="685800" cy="475488"/>
           </a:xfrm>
           <a:prstGeom prst="rect">
             <a:avLst/>
@@ -15441,7 +15429,7 @@
                 <a:ea typeface="Trebuchet MS" pitchFamily="34" charset="-122"/>
                 <a:cs typeface="Trebuchet MS" pitchFamily="34" charset="-120"/>
               </a:rPr>
-              <a:t>ll</a:t>
+              <a:t>n</a:t>
             </a:r>
             <a:endParaRPr lang="en-US" sz="900" dirty="0"/>
           </a:p>
@@ -15449,57 +15437,18 @@
       </p:sp>
       <p:sp>
         <p:nvSpPr>
-          <p:cNvPr id="41" name="Text 39"/>
-          <p:cNvSpPr/>
-          <p:nvPr/>
-        </p:nvSpPr>
-        <p:spPr>
-          <a:xfrm>
-            <a:off x="4850892" y="4572000"/>
-            <a:ext cx="685800" cy="219456"/>
-          </a:xfrm>
-          <a:prstGeom prst="rect">
-            <a:avLst/>
-          </a:prstGeom>
-          <a:noFill/>
-          <a:ln/>
-        </p:spPr>
-        <p:txBody>
-          <a:bodyPr wrap="square" lIns="0" tIns="0" rIns="0" bIns="0" rtlCol="0" anchor="t"/>
-          <a:lstStyle/>
-          <a:p>
-            <a:pPr algn="ctr" indent="0" marL="0">
-              <a:buNone/>
-            </a:pPr>
-            <a:r>
-              <a:rPr lang="en-US" sz="750" i="1" dirty="0">
-                <a:solidFill>
-                  <a:srgbClr val="94A3B8"/>
-                </a:solidFill>
-                <a:latin typeface="Calibri" pitchFamily="34" charset="0"/>
-                <a:ea typeface="Calibri" pitchFamily="34" charset="-122"/>
-                <a:cs typeface="Calibri" pitchFamily="34" charset="-120"/>
-              </a:rPr>
-              <a:t>/l/</a:t>
-            </a:r>
-            <a:endParaRPr lang="en-US" sz="750" dirty="0"/>
-          </a:p>
-        </p:txBody>
-      </p:sp>
-      <p:sp>
-        <p:nvSpPr>
-          <p:cNvPr id="42" name="Shape 40"/>
-          <p:cNvSpPr/>
-          <p:nvPr/>
-        </p:nvSpPr>
-        <p:spPr>
-          <a:xfrm>
-            <a:off x="5759577" y="4169664"/>
-            <a:ext cx="685800" cy="384048"/>
+          <p:cNvPr id="41" name="Shape 39"/>
+          <p:cNvSpPr/>
+          <p:nvPr/>
+        </p:nvSpPr>
+        <p:spPr>
+          <a:xfrm>
+            <a:off x="6408638" y="4169664"/>
+            <a:ext cx="685800" cy="475488"/>
           </a:xfrm>
           <a:prstGeom prst="rect">
             <a:avLst>
-              <a:gd name="adj" fmla="val 9524"/>
+              <a:gd name="adj" fmla="val 7692"/>
             </a:avLst>
           </a:prstGeom>
           <a:solidFill>
@@ -15515,14 +15464,14 @@
       </p:sp>
       <p:sp>
         <p:nvSpPr>
-          <p:cNvPr id="43" name="Text 41"/>
-          <p:cNvSpPr/>
-          <p:nvPr/>
-        </p:nvSpPr>
-        <p:spPr>
-          <a:xfrm>
-            <a:off x="5759577" y="4169664"/>
-            <a:ext cx="685800" cy="384048"/>
+          <p:cNvPr id="42" name="Text 40"/>
+          <p:cNvSpPr/>
+          <p:nvPr/>
+        </p:nvSpPr>
+        <p:spPr>
+          <a:xfrm>
+            <a:off x="6408638" y="4169664"/>
+            <a:ext cx="685800" cy="475488"/>
           </a:xfrm>
           <a:prstGeom prst="rect">
             <a:avLst/>
@@ -15546,7 +15495,7 @@
                 <a:ea typeface="Trebuchet MS" pitchFamily="34" charset="-122"/>
                 <a:cs typeface="Trebuchet MS" pitchFamily="34" charset="-120"/>
               </a:rPr>
-              <a:t>n</a:t>
+              <a:t>e</a:t>
             </a:r>
             <a:endParaRPr lang="en-US" sz="900" dirty="0"/>
           </a:p>
@@ -15554,18 +15503,18 @@
       </p:sp>
       <p:sp>
         <p:nvSpPr>
-          <p:cNvPr id="44" name="Shape 42"/>
-          <p:cNvSpPr/>
-          <p:nvPr/>
-        </p:nvSpPr>
-        <p:spPr>
-          <a:xfrm>
-            <a:off x="6668262" y="4169664"/>
-            <a:ext cx="685800" cy="384048"/>
+          <p:cNvPr id="43" name="Shape 41"/>
+          <p:cNvSpPr/>
+          <p:nvPr/>
+        </p:nvSpPr>
+        <p:spPr>
+          <a:xfrm>
+            <a:off x="7447135" y="4169664"/>
+            <a:ext cx="685800" cy="475488"/>
           </a:xfrm>
           <a:prstGeom prst="rect">
             <a:avLst>
-              <a:gd name="adj" fmla="val 9524"/>
+              <a:gd name="adj" fmla="val 7692"/>
             </a:avLst>
           </a:prstGeom>
           <a:solidFill>
@@ -15581,14 +15530,14 @@
       </p:sp>
       <p:sp>
         <p:nvSpPr>
-          <p:cNvPr id="45" name="Text 43"/>
-          <p:cNvSpPr/>
-          <p:nvPr/>
-        </p:nvSpPr>
-        <p:spPr>
-          <a:xfrm>
-            <a:off x="6668262" y="4169664"/>
-            <a:ext cx="685800" cy="384048"/>
+          <p:cNvPr id="44" name="Text 42"/>
+          <p:cNvSpPr/>
+          <p:nvPr/>
+        </p:nvSpPr>
+        <p:spPr>
+          <a:xfrm>
+            <a:off x="7447135" y="4169664"/>
+            <a:ext cx="685800" cy="475488"/>
           </a:xfrm>
           <a:prstGeom prst="rect">
             <a:avLst/>
@@ -15612,114 +15561,9 @@
                 <a:ea typeface="Trebuchet MS" pitchFamily="34" charset="-122"/>
                 <a:cs typeface="Trebuchet MS" pitchFamily="34" charset="-120"/>
               </a:rPr>
-              <a:t>e</a:t>
+              <a:t>ss</a:t>
             </a:r>
             <a:endParaRPr lang="en-US" sz="900" dirty="0"/>
-          </a:p>
-        </p:txBody>
-      </p:sp>
-      <p:sp>
-        <p:nvSpPr>
-          <p:cNvPr id="46" name="Shape 44"/>
-          <p:cNvSpPr/>
-          <p:nvPr/>
-        </p:nvSpPr>
-        <p:spPr>
-          <a:xfrm>
-            <a:off x="7576947" y="4169664"/>
-            <a:ext cx="685800" cy="384048"/>
-          </a:xfrm>
-          <a:prstGeom prst="rect">
-            <a:avLst>
-              <a:gd name="adj" fmla="val 9524"/>
-            </a:avLst>
-          </a:prstGeom>
-          <a:solidFill>
-            <a:srgbClr val="FFFFFF"/>
-          </a:solidFill>
-          <a:ln w="12700">
-            <a:solidFill>
-              <a:srgbClr val="DB2777"/>
-            </a:solidFill>
-            <a:prstDash val="solid"/>
-          </a:ln>
-        </p:spPr>
-      </p:sp>
-      <p:sp>
-        <p:nvSpPr>
-          <p:cNvPr id="47" name="Text 45"/>
-          <p:cNvSpPr/>
-          <p:nvPr/>
-        </p:nvSpPr>
-        <p:spPr>
-          <a:xfrm>
-            <a:off x="7576947" y="4169664"/>
-            <a:ext cx="685800" cy="384048"/>
-          </a:xfrm>
-          <a:prstGeom prst="rect">
-            <a:avLst/>
-          </a:prstGeom>
-          <a:noFill/>
-          <a:ln/>
-        </p:spPr>
-        <p:txBody>
-          <a:bodyPr wrap="square" lIns="0" tIns="0" rIns="0" bIns="0" rtlCol="0" anchor="ctr"/>
-          <a:lstStyle/>
-          <a:p>
-            <a:pPr algn="ctr" indent="0" marL="0">
-              <a:buNone/>
-            </a:pPr>
-            <a:r>
-              <a:rPr lang="en-US" sz="900" b="1" dirty="0">
-                <a:solidFill>
-                  <a:srgbClr val="9D174D"/>
-                </a:solidFill>
-                <a:latin typeface="Trebuchet MS" pitchFamily="34" charset="0"/>
-                <a:ea typeface="Trebuchet MS" pitchFamily="34" charset="-122"/>
-                <a:cs typeface="Trebuchet MS" pitchFamily="34" charset="-120"/>
-              </a:rPr>
-              <a:t>ss</a:t>
-            </a:r>
-            <a:endParaRPr lang="en-US" sz="900" dirty="0"/>
-          </a:p>
-        </p:txBody>
-      </p:sp>
-      <p:sp>
-        <p:nvSpPr>
-          <p:cNvPr id="48" name="Text 46"/>
-          <p:cNvSpPr/>
-          <p:nvPr/>
-        </p:nvSpPr>
-        <p:spPr>
-          <a:xfrm>
-            <a:off x="7576947" y="4572000"/>
-            <a:ext cx="685800" cy="219456"/>
-          </a:xfrm>
-          <a:prstGeom prst="rect">
-            <a:avLst/>
-          </a:prstGeom>
-          <a:noFill/>
-          <a:ln/>
-        </p:spPr>
-        <p:txBody>
-          <a:bodyPr wrap="square" lIns="0" tIns="0" rIns="0" bIns="0" rtlCol="0" anchor="t"/>
-          <a:lstStyle/>
-          <a:p>
-            <a:pPr algn="ctr" indent="0" marL="0">
-              <a:buNone/>
-            </a:pPr>
-            <a:r>
-              <a:rPr lang="en-US" sz="750" i="1" dirty="0">
-                <a:solidFill>
-                  <a:srgbClr val="94A3B8"/>
-                </a:solidFill>
-                <a:latin typeface="Calibri" pitchFamily="34" charset="0"/>
-                <a:ea typeface="Calibri" pitchFamily="34" charset="-122"/>
-                <a:cs typeface="Calibri" pitchFamily="34" charset="-120"/>
-              </a:rPr>
-              <a:t>/s/</a:t>
-            </a:r>
-            <a:endParaRPr lang="en-US" sz="750" dirty="0"/>
           </a:p>
         </p:txBody>
       </p:sp>
@@ -16291,7 +16135,7 @@
                 <a:ea typeface="Calibri" pitchFamily="34" charset="-122"/>
                 <a:cs typeface="Calibri" pitchFamily="34" charset="-120"/>
               </a:rPr>
-              <a:t>Word Labs  •  wordlabs.app  •  Suffix: '-ness' = state or quality of</a:t>
+              <a:t>Word Labs  •  wordlabs.app  •  Suffix: '-ness' = state or quality of being</a:t>
             </a:r>
             <a:endParaRPr lang="en-US" sz="800" dirty="0"/>
           </a:p>
@@ -16931,7 +16775,7 @@
                 <a:ea typeface="Calibri" pitchFamily="34" charset="-122"/>
                 <a:cs typeface="Calibri" pitchFamily="34" charset="-120"/>
               </a:rPr>
-              <a:t>Word Labs  •  wordlabs.app  •  Suffix: '-ness' = state or quality of</a:t>
+              <a:t>Word Labs  •  wordlabs.app  •  Suffix: '-ness' = state or quality of being</a:t>
             </a:r>
             <a:endParaRPr lang="en-US" sz="800" dirty="0"/>
           </a:p>
@@ -17043,7 +16887,7 @@
                 <a:ea typeface="Calibri" pitchFamily="34" charset="-122"/>
                 <a:cs typeface="Calibri" pitchFamily="34" charset="-120"/>
               </a:rPr>
-              <a:t>The </a:t>
+              <a:t>Her </a:t>
             </a:r>
             <a:pPr algn="l" indent="0" marL="0">
               <a:buNone/>
@@ -17060,7 +16904,7 @@
                 <a:ea typeface="Calibri" pitchFamily="34" charset="-122"/>
                 <a:cs typeface="Calibri" pitchFamily="34" charset="-120"/>
               </a:rPr>
-              <a:t>boldness</a:t>
+              <a:t>kindness</a:t>
             </a:r>
             <a:pPr algn="l" indent="0" marL="0">
               <a:buNone/>
@@ -17074,7 +16918,7 @@
                 <a:ea typeface="Calibri" pitchFamily="34" charset="-122"/>
                 <a:cs typeface="Calibri" pitchFamily="34" charset="-120"/>
               </a:rPr>
-              <a:t> of the explorer, the </a:t>
+              <a:t> and </a:t>
             </a:r>
             <a:pPr algn="l" indent="0" marL="0">
               <a:buNone/>
@@ -17091,7 +16935,7 @@
                 <a:ea typeface="Calibri" pitchFamily="34" charset="-122"/>
                 <a:cs typeface="Calibri" pitchFamily="34" charset="-120"/>
               </a:rPr>
-              <a:t>darkness</a:t>
+              <a:t>stillness</a:t>
             </a:r>
             <a:pPr algn="l" indent="0" marL="0">
               <a:buNone/>
@@ -17105,7 +16949,7 @@
                 <a:ea typeface="Calibri" pitchFamily="34" charset="-122"/>
                 <a:cs typeface="Calibri" pitchFamily="34" charset="-120"/>
               </a:rPr>
-              <a:t> of the cave, and her </a:t>
+              <a:t> during the storm helped calm the </a:t>
             </a:r>
             <a:pPr algn="l" indent="0" marL="0">
               <a:buNone/>
@@ -17122,7 +16966,7 @@
                 <a:ea typeface="Calibri" pitchFamily="34" charset="-122"/>
                 <a:cs typeface="Calibri" pitchFamily="34" charset="-120"/>
               </a:rPr>
-              <a:t>calmness</a:t>
+              <a:t>sadness</a:t>
             </a:r>
             <a:pPr algn="l" indent="0" marL="0">
               <a:buNone/>
@@ -17136,7 +16980,7 @@
                 <a:ea typeface="Calibri" pitchFamily="34" charset="-122"/>
                 <a:cs typeface="Calibri" pitchFamily="34" charset="-120"/>
               </a:rPr>
-              <a:t> helped her find the way out.</a:t>
+              <a:t> everyone felt.</a:t>
             </a:r>
             <a:endParaRPr lang="en-US" sz="1800" dirty="0"/>
           </a:p>
@@ -17291,7 +17135,7 @@
                 <a:ea typeface="Trebuchet MS" pitchFamily="34" charset="-122"/>
                 <a:cs typeface="Trebuchet MS" pitchFamily="34" charset="-120"/>
               </a:rPr>
-              <a:t>boldness</a:t>
+              <a:t>kindness</a:t>
             </a:r>
             <a:endParaRPr lang="en-US" sz="1400" dirty="0"/>
           </a:p>
@@ -17419,7 +17263,7 @@
                 <a:ea typeface="Trebuchet MS" pitchFamily="34" charset="-122"/>
                 <a:cs typeface="Trebuchet MS" pitchFamily="34" charset="-120"/>
               </a:rPr>
-              <a:t>darkness</a:t>
+              <a:t>stillness</a:t>
             </a:r>
             <a:endParaRPr lang="en-US" sz="1400" dirty="0"/>
           </a:p>
@@ -17547,7 +17391,7 @@
                 <a:ea typeface="Trebuchet MS" pitchFamily="34" charset="-122"/>
                 <a:cs typeface="Trebuchet MS" pitchFamily="34" charset="-120"/>
               </a:rPr>
-              <a:t>calmness</a:t>
+              <a:t>sadness</a:t>
             </a:r>
             <a:endParaRPr lang="en-US" sz="1400" dirty="0"/>
           </a:p>
@@ -17878,7 +17722,7 @@
                 <a:ea typeface="Calibri" pitchFamily="34" charset="-122"/>
                 <a:cs typeface="Calibri" pitchFamily="34" charset="-120"/>
               </a:rPr>
-              <a:t>Word Labs  •  wordlabs.app  •  Suffix: '-ness' = state or quality of</a:t>
+              <a:t>Word Labs  •  wordlabs.app  •  Suffix: '-ness' = state or quality of being</a:t>
             </a:r>
             <a:endParaRPr lang="en-US" sz="800" dirty="0"/>
           </a:p>
@@ -18017,7 +17861,7 @@
                 <a:ea typeface="Trebuchet MS" pitchFamily="34" charset="-122"/>
                 <a:cs typeface="Trebuchet MS" pitchFamily="34" charset="-120"/>
               </a:rPr>
-              <a:t>boldness</a:t>
+              <a:t>kindness</a:t>
             </a:r>
             <a:endParaRPr lang="en-US" sz="2800" dirty="0"/>
           </a:p>
@@ -18705,7 +18549,7 @@
                 <a:ea typeface="Calibri" pitchFamily="34" charset="-122"/>
                 <a:cs typeface="Calibri" pitchFamily="34" charset="-120"/>
               </a:rPr>
-              <a:t>Word Labs  •  wordlabs.app  •  Suffix: '-ness' = state or quality of</a:t>
+              <a:t>Word Labs  •  wordlabs.app  •  Suffix: '-ness' = state or quality of being</a:t>
             </a:r>
             <a:endParaRPr lang="en-US" sz="800" dirty="0"/>
           </a:p>
@@ -18844,7 +18688,7 @@
                 <a:ea typeface="Trebuchet MS" pitchFamily="34" charset="-122"/>
                 <a:cs typeface="Trebuchet MS" pitchFamily="34" charset="-120"/>
               </a:rPr>
-              <a:t>boldness</a:t>
+              <a:t>kindness</a:t>
             </a:r>
             <a:endParaRPr lang="en-US" sz="2800" dirty="0"/>
           </a:p>
@@ -18983,7 +18827,7 @@
                 <a:ea typeface="Trebuchet MS" pitchFamily="34" charset="-122"/>
                 <a:cs typeface="Trebuchet MS" pitchFamily="34" charset="-120"/>
               </a:rPr>
-              <a:t>bold</a:t>
+              <a:t>kind</a:t>
             </a:r>
             <a:endParaRPr lang="en-US" sz="1300" dirty="0"/>
           </a:p>
@@ -19022,7 +18866,7 @@
                 <a:ea typeface="Calibri" pitchFamily="34" charset="-122"/>
                 <a:cs typeface="Calibri" pitchFamily="34" charset="-120"/>
               </a:rPr>
-              <a:t>brave and confident</a:t>
+              <a:t>friendly and caring</a:t>
             </a:r>
             <a:endParaRPr lang="en-US" sz="850" dirty="0"/>
           </a:p>
@@ -19134,7 +18978,7 @@
                 <a:ea typeface="Calibri" pitchFamily="34" charset="-122"/>
                 <a:cs typeface="Calibri" pitchFamily="34" charset="-120"/>
               </a:rPr>
-              <a:t>state or quality of</a:t>
+              <a:t>state or quality of being</a:t>
             </a:r>
             <a:endParaRPr lang="en-US" sz="850" dirty="0"/>
           </a:p>
@@ -19690,7 +19534,7 @@
                 <a:ea typeface="Calibri" pitchFamily="34" charset="-122"/>
                 <a:cs typeface="Calibri" pitchFamily="34" charset="-120"/>
               </a:rPr>
-              <a:t>Word Labs  •  wordlabs.app  •  Suffix: '-ness' = state or quality of</a:t>
+              <a:t>Word Labs  •  wordlabs.app  •  Suffix: '-ness' = state or quality of being</a:t>
             </a:r>
             <a:endParaRPr lang="en-US" sz="800" dirty="0"/>
           </a:p>
@@ -19829,7 +19673,7 @@
                 <a:ea typeface="Trebuchet MS" pitchFamily="34" charset="-122"/>
                 <a:cs typeface="Trebuchet MS" pitchFamily="34" charset="-120"/>
               </a:rPr>
-              <a:t>boldness</a:t>
+              <a:t>kindness</a:t>
             </a:r>
             <a:endParaRPr lang="en-US" sz="2800" dirty="0"/>
           </a:p>
@@ -19968,7 +19812,7 @@
                 <a:ea typeface="Trebuchet MS" pitchFamily="34" charset="-122"/>
                 <a:cs typeface="Trebuchet MS" pitchFamily="34" charset="-120"/>
               </a:rPr>
-              <a:t>bold</a:t>
+              <a:t>kind</a:t>
             </a:r>
             <a:endParaRPr lang="en-US" sz="1300" dirty="0"/>
           </a:p>
@@ -20007,7 +19851,7 @@
                 <a:ea typeface="Calibri" pitchFamily="34" charset="-122"/>
                 <a:cs typeface="Calibri" pitchFamily="34" charset="-120"/>
               </a:rPr>
-              <a:t>brave and confident</a:t>
+              <a:t>friendly and caring</a:t>
             </a:r>
             <a:endParaRPr lang="en-US" sz="850" dirty="0"/>
           </a:p>
@@ -20119,7 +19963,7 @@
                 <a:ea typeface="Calibri" pitchFamily="34" charset="-122"/>
                 <a:cs typeface="Calibri" pitchFamily="34" charset="-120"/>
               </a:rPr>
-              <a:t>state or quality of</a:t>
+              <a:t>state or quality of being</a:t>
             </a:r>
             <a:endParaRPr lang="en-US" sz="850" dirty="0"/>
           </a:p>
@@ -20278,7 +20122,7 @@
                 <a:ea typeface="Trebuchet MS" pitchFamily="34" charset="-122"/>
                 <a:cs typeface="Trebuchet MS" pitchFamily="34" charset="-120"/>
               </a:rPr>
-              <a:t>bold</a:t>
+              <a:t>kind</a:t>
             </a:r>
             <a:endParaRPr lang="en-US" sz="1400" dirty="0"/>
           </a:p>
@@ -20807,7 +20651,7 @@
                 <a:ea typeface="Calibri" pitchFamily="34" charset="-122"/>
                 <a:cs typeface="Calibri" pitchFamily="34" charset="-120"/>
               </a:rPr>
-              <a:t>Word Labs  •  wordlabs.app  •  Suffix: '-ness' = state or quality of</a:t>
+              <a:t>Word Labs  •  wordlabs.app  •  Suffix: '-ness' = state or quality of being</a:t>
             </a:r>
             <a:endParaRPr lang="en-US" sz="800" dirty="0"/>
           </a:p>
@@ -20946,7 +20790,7 @@
                 <a:ea typeface="Trebuchet MS" pitchFamily="34" charset="-122"/>
                 <a:cs typeface="Trebuchet MS" pitchFamily="34" charset="-120"/>
               </a:rPr>
-              <a:t>boldness</a:t>
+              <a:t>kindness</a:t>
             </a:r>
             <a:endParaRPr lang="en-US" sz="2800" dirty="0"/>
           </a:p>
@@ -21085,7 +20929,7 @@
                 <a:ea typeface="Trebuchet MS" pitchFamily="34" charset="-122"/>
                 <a:cs typeface="Trebuchet MS" pitchFamily="34" charset="-120"/>
               </a:rPr>
-              <a:t>bold</a:t>
+              <a:t>kind</a:t>
             </a:r>
             <a:endParaRPr lang="en-US" sz="1300" dirty="0"/>
           </a:p>
@@ -21124,7 +20968,7 @@
                 <a:ea typeface="Calibri" pitchFamily="34" charset="-122"/>
                 <a:cs typeface="Calibri" pitchFamily="34" charset="-120"/>
               </a:rPr>
-              <a:t>brave and confident</a:t>
+              <a:t>friendly and caring</a:t>
             </a:r>
             <a:endParaRPr lang="en-US" sz="850" dirty="0"/>
           </a:p>
@@ -21236,7 +21080,7 @@
                 <a:ea typeface="Calibri" pitchFamily="34" charset="-122"/>
                 <a:cs typeface="Calibri" pitchFamily="34" charset="-120"/>
               </a:rPr>
-              <a:t>state or quality of</a:t>
+              <a:t>state or quality of being</a:t>
             </a:r>
             <a:endParaRPr lang="en-US" sz="850" dirty="0"/>
           </a:p>
@@ -21395,7 +21239,7 @@
                 <a:ea typeface="Trebuchet MS" pitchFamily="34" charset="-122"/>
                 <a:cs typeface="Trebuchet MS" pitchFamily="34" charset="-120"/>
               </a:rPr>
-              <a:t>bold</a:t>
+              <a:t>kind</a:t>
             </a:r>
             <a:endParaRPr lang="en-US" sz="1400" dirty="0"/>
           </a:p>
@@ -21581,11 +21425,11 @@
         <p:spPr>
           <a:xfrm>
             <a:off x="1874520" y="4096512"/>
-            <a:ext cx="6903720" cy="804672"/>
+            <a:ext cx="6903720" cy="658368"/>
           </a:xfrm>
           <a:prstGeom prst="rect">
             <a:avLst>
-              <a:gd name="adj" fmla="val 6818"/>
+              <a:gd name="adj" fmla="val 8333"/>
             </a:avLst>
           </a:prstGeom>
           <a:solidFill>
@@ -21608,11 +21452,11 @@
         <p:spPr>
           <a:xfrm>
             <a:off x="2124837" y="4169664"/>
-            <a:ext cx="685800" cy="384048"/>
+            <a:ext cx="685800" cy="475488"/>
           </a:xfrm>
           <a:prstGeom prst="rect">
             <a:avLst>
-              <a:gd name="adj" fmla="val 9524"/>
+              <a:gd name="adj" fmla="val 7692"/>
             </a:avLst>
           </a:prstGeom>
           <a:solidFill>
@@ -21635,7 +21479,7 @@
         <p:spPr>
           <a:xfrm>
             <a:off x="2124837" y="4169664"/>
-            <a:ext cx="685800" cy="384048"/>
+            <a:ext cx="685800" cy="475488"/>
           </a:xfrm>
           <a:prstGeom prst="rect">
             <a:avLst/>
@@ -21659,7 +21503,7 @@
                 <a:ea typeface="Trebuchet MS" pitchFamily="34" charset="-122"/>
                 <a:cs typeface="Trebuchet MS" pitchFamily="34" charset="-120"/>
               </a:rPr>
-              <a:t>b</a:t>
+              <a:t>k</a:t>
             </a:r>
             <a:endParaRPr lang="en-US" sz="900" dirty="0"/>
           </a:p>
@@ -21674,11 +21518,11 @@
         <p:spPr>
           <a:xfrm>
             <a:off x="3033522" y="4169664"/>
-            <a:ext cx="685800" cy="384048"/>
+            <a:ext cx="685800" cy="475488"/>
           </a:xfrm>
           <a:prstGeom prst="rect">
             <a:avLst>
-              <a:gd name="adj" fmla="val 9524"/>
+              <a:gd name="adj" fmla="val 7692"/>
             </a:avLst>
           </a:prstGeom>
           <a:solidFill>
@@ -21701,7 +21545,7 @@
         <p:spPr>
           <a:xfrm>
             <a:off x="3033522" y="4169664"/>
-            <a:ext cx="685800" cy="384048"/>
+            <a:ext cx="685800" cy="475488"/>
           </a:xfrm>
           <a:prstGeom prst="rect">
             <a:avLst/>
@@ -21725,7 +21569,7 @@
                 <a:ea typeface="Trebuchet MS" pitchFamily="34" charset="-122"/>
                 <a:cs typeface="Trebuchet MS" pitchFamily="34" charset="-120"/>
               </a:rPr>
-              <a:t>o</a:t>
+              <a:t>i</a:t>
             </a:r>
             <a:endParaRPr lang="en-US" sz="900" dirty="0"/>
           </a:p>
@@ -21740,11 +21584,11 @@
         <p:spPr>
           <a:xfrm>
             <a:off x="3942207" y="4169664"/>
-            <a:ext cx="685800" cy="384048"/>
+            <a:ext cx="685800" cy="475488"/>
           </a:xfrm>
           <a:prstGeom prst="rect">
             <a:avLst>
-              <a:gd name="adj" fmla="val 9524"/>
+              <a:gd name="adj" fmla="val 7692"/>
             </a:avLst>
           </a:prstGeom>
           <a:solidFill>
@@ -21767,7 +21611,7 @@
         <p:spPr>
           <a:xfrm>
             <a:off x="3942207" y="4169664"/>
-            <a:ext cx="685800" cy="384048"/>
+            <a:ext cx="685800" cy="475488"/>
           </a:xfrm>
           <a:prstGeom prst="rect">
             <a:avLst/>
@@ -21791,7 +21635,7 @@
                 <a:ea typeface="Trebuchet MS" pitchFamily="34" charset="-122"/>
                 <a:cs typeface="Trebuchet MS" pitchFamily="34" charset="-120"/>
               </a:rPr>
-              <a:t>l</a:t>
+              <a:t>n</a:t>
             </a:r>
             <a:endParaRPr lang="en-US" sz="900" dirty="0"/>
           </a:p>
@@ -21806,11 +21650,11 @@
         <p:spPr>
           <a:xfrm>
             <a:off x="4850892" y="4169664"/>
-            <a:ext cx="685800" cy="384048"/>
+            <a:ext cx="685800" cy="475488"/>
           </a:xfrm>
           <a:prstGeom prst="rect">
             <a:avLst>
-              <a:gd name="adj" fmla="val 9524"/>
+              <a:gd name="adj" fmla="val 7692"/>
             </a:avLst>
           </a:prstGeom>
           <a:solidFill>
@@ -21833,7 +21677,7 @@
         <p:spPr>
           <a:xfrm>
             <a:off x="4850892" y="4169664"/>
-            <a:ext cx="685800" cy="384048"/>
+            <a:ext cx="685800" cy="475488"/>
           </a:xfrm>
           <a:prstGeom prst="rect">
             <a:avLst/>
@@ -21872,11 +21716,11 @@
         <p:spPr>
           <a:xfrm>
             <a:off x="5759577" y="4169664"/>
-            <a:ext cx="685800" cy="384048"/>
+            <a:ext cx="685800" cy="475488"/>
           </a:xfrm>
           <a:prstGeom prst="rect">
             <a:avLst>
-              <a:gd name="adj" fmla="val 9524"/>
+              <a:gd name="adj" fmla="val 7692"/>
             </a:avLst>
           </a:prstGeom>
           <a:solidFill>
@@ -21899,7 +21743,7 @@
         <p:spPr>
           <a:xfrm>
             <a:off x="5759577" y="4169664"/>
-            <a:ext cx="685800" cy="384048"/>
+            <a:ext cx="685800" cy="475488"/>
           </a:xfrm>
           <a:prstGeom prst="rect">
             <a:avLst/>
@@ -21938,11 +21782,11 @@
         <p:spPr>
           <a:xfrm>
             <a:off x="6668262" y="4169664"/>
-            <a:ext cx="685800" cy="384048"/>
+            <a:ext cx="685800" cy="475488"/>
           </a:xfrm>
           <a:prstGeom prst="rect">
             <a:avLst>
-              <a:gd name="adj" fmla="val 9524"/>
+              <a:gd name="adj" fmla="val 7692"/>
             </a:avLst>
           </a:prstGeom>
           <a:solidFill>
@@ -21965,7 +21809,7 @@
         <p:spPr>
           <a:xfrm>
             <a:off x="6668262" y="4169664"/>
-            <a:ext cx="685800" cy="384048"/>
+            <a:ext cx="685800" cy="475488"/>
           </a:xfrm>
           <a:prstGeom prst="rect">
             <a:avLst/>
@@ -22004,11 +21848,11 @@
         <p:spPr>
           <a:xfrm>
             <a:off x="7576947" y="4169664"/>
-            <a:ext cx="685800" cy="384048"/>
+            <a:ext cx="685800" cy="475488"/>
           </a:xfrm>
           <a:prstGeom prst="rect">
             <a:avLst>
-              <a:gd name="adj" fmla="val 9524"/>
+              <a:gd name="adj" fmla="val 7692"/>
             </a:avLst>
           </a:prstGeom>
           <a:solidFill>
@@ -22031,7 +21875,7 @@
         <p:spPr>
           <a:xfrm>
             <a:off x="7576947" y="4169664"/>
-            <a:ext cx="685800" cy="384048"/>
+            <a:ext cx="685800" cy="475488"/>
           </a:xfrm>
           <a:prstGeom prst="rect">
             <a:avLst/>
@@ -22058,45 +21902,6 @@
               <a:t>ss</a:t>
             </a:r>
             <a:endParaRPr lang="en-US" sz="900" dirty="0"/>
-          </a:p>
-        </p:txBody>
-      </p:sp>
-      <p:sp>
-        <p:nvSpPr>
-          <p:cNvPr id="47" name="Text 45"/>
-          <p:cNvSpPr/>
-          <p:nvPr/>
-        </p:nvSpPr>
-        <p:spPr>
-          <a:xfrm>
-            <a:off x="7576947" y="4572000"/>
-            <a:ext cx="685800" cy="219456"/>
-          </a:xfrm>
-          <a:prstGeom prst="rect">
-            <a:avLst/>
-          </a:prstGeom>
-          <a:noFill/>
-          <a:ln/>
-        </p:spPr>
-        <p:txBody>
-          <a:bodyPr wrap="square" lIns="0" tIns="0" rIns="0" bIns="0" rtlCol="0" anchor="t"/>
-          <a:lstStyle/>
-          <a:p>
-            <a:pPr algn="ctr" indent="0" marL="0">
-              <a:buNone/>
-            </a:pPr>
-            <a:r>
-              <a:rPr lang="en-US" sz="750" i="1" dirty="0">
-                <a:solidFill>
-                  <a:srgbClr val="94A3B8"/>
-                </a:solidFill>
-                <a:latin typeface="Calibri" pitchFamily="34" charset="0"/>
-                <a:ea typeface="Calibri" pitchFamily="34" charset="-122"/>
-                <a:cs typeface="Calibri" pitchFamily="34" charset="-120"/>
-              </a:rPr>
-              <a:t>/s/</a:t>
-            </a:r>
-            <a:endParaRPr lang="en-US" sz="750" dirty="0"/>
           </a:p>
         </p:txBody>
       </p:sp>
@@ -22386,7 +22191,7 @@
                 <a:ea typeface="Calibri" pitchFamily="34" charset="-122"/>
                 <a:cs typeface="Calibri" pitchFamily="34" charset="-120"/>
               </a:rPr>
-              <a:t>Word Labs  •  wordlabs.app  •  Suffix: '-ness' = state or quality of</a:t>
+              <a:t>Word Labs  •  wordlabs.app  •  Suffix: '-ness' = state or quality of being</a:t>
             </a:r>
             <a:endParaRPr lang="en-US" sz="800" dirty="0"/>
           </a:p>
@@ -22525,7 +22330,7 @@
                 <a:ea typeface="Trebuchet MS" pitchFamily="34" charset="-122"/>
                 <a:cs typeface="Trebuchet MS" pitchFamily="34" charset="-120"/>
               </a:rPr>
-              <a:t>darkness</a:t>
+              <a:t>stillness</a:t>
             </a:r>
             <a:endParaRPr lang="en-US" sz="2800" dirty="0"/>
           </a:p>
@@ -23213,7 +23018,7 @@
                 <a:ea typeface="Calibri" pitchFamily="34" charset="-122"/>
                 <a:cs typeface="Calibri" pitchFamily="34" charset="-120"/>
               </a:rPr>
-              <a:t>Word Labs  •  wordlabs.app  •  Suffix: '-ness' = state or quality of</a:t>
+              <a:t>Word Labs  •  wordlabs.app  •  Suffix: '-ness' = state or quality of being</a:t>
             </a:r>
             <a:endParaRPr lang="en-US" sz="800" dirty="0"/>
           </a:p>
@@ -23352,7 +23157,7 @@
                 <a:ea typeface="Trebuchet MS" pitchFamily="34" charset="-122"/>
                 <a:cs typeface="Trebuchet MS" pitchFamily="34" charset="-120"/>
               </a:rPr>
-              <a:t>darkness</a:t>
+              <a:t>stillness</a:t>
             </a:r>
             <a:endParaRPr lang="en-US" sz="2800" dirty="0"/>
           </a:p>
@@ -23491,7 +23296,7 @@
                 <a:ea typeface="Trebuchet MS" pitchFamily="34" charset="-122"/>
                 <a:cs typeface="Trebuchet MS" pitchFamily="34" charset="-120"/>
               </a:rPr>
-              <a:t>dark</a:t>
+              <a:t>still</a:t>
             </a:r>
             <a:endParaRPr lang="en-US" sz="1300" dirty="0"/>
           </a:p>
@@ -23530,7 +23335,7 @@
                 <a:ea typeface="Calibri" pitchFamily="34" charset="-122"/>
                 <a:cs typeface="Calibri" pitchFamily="34" charset="-120"/>
               </a:rPr>
-              <a:t>without light</a:t>
+              <a:t>not moving, quiet</a:t>
             </a:r>
             <a:endParaRPr lang="en-US" sz="850" dirty="0"/>
           </a:p>
@@ -23642,7 +23447,7 @@
                 <a:ea typeface="Calibri" pitchFamily="34" charset="-122"/>
                 <a:cs typeface="Calibri" pitchFamily="34" charset="-120"/>
               </a:rPr>
-              <a:t>state or quality of</a:t>
+              <a:t>state or quality of being</a:t>
             </a:r>
             <a:endParaRPr lang="en-US" sz="850" dirty="0"/>
           </a:p>
@@ -24198,7 +24003,7 @@
                 <a:ea typeface="Calibri" pitchFamily="34" charset="-122"/>
                 <a:cs typeface="Calibri" pitchFamily="34" charset="-120"/>
               </a:rPr>
-              <a:t>Word Labs  •  wordlabs.app  •  Suffix: '-ness' = state or quality of</a:t>
+              <a:t>Word Labs  •  wordlabs.app  •  Suffix: '-ness' = state or quality of being</a:t>
             </a:r>
             <a:endParaRPr lang="en-US" sz="800" dirty="0"/>
           </a:p>
@@ -24271,7 +24076,7 @@
                 <a:ea typeface="Trebuchet MS" pitchFamily="34" charset="-122"/>
                 <a:cs typeface="Trebuchet MS" pitchFamily="34" charset="-120"/>
               </a:rPr>
-              <a:t>We are learning that the suffix '-ness' means 'state or quality of'.</a:t>
+              <a:t>We are learning that the suffix '-ness' means 'state or quality of being'.</a:t>
             </a:r>
             <a:endParaRPr lang="en-US" sz="2000" dirty="0"/>
           </a:p>
@@ -24917,7 +24722,7 @@
                 <a:ea typeface="Calibri" pitchFamily="34" charset="-122"/>
                 <a:cs typeface="Calibri" pitchFamily="34" charset="-120"/>
               </a:rPr>
-              <a:t>Word Labs  •  wordlabs.app  •  Suffix: '-ness' = state or quality of</a:t>
+              <a:t>Word Labs  •  wordlabs.app  •  Suffix: '-ness' = state or quality of being</a:t>
             </a:r>
             <a:endParaRPr lang="en-US" sz="800" dirty="0"/>
           </a:p>
@@ -25056,7 +24861,7 @@
                 <a:ea typeface="Trebuchet MS" pitchFamily="34" charset="-122"/>
                 <a:cs typeface="Trebuchet MS" pitchFamily="34" charset="-120"/>
               </a:rPr>
-              <a:t>darkness</a:t>
+              <a:t>stillness</a:t>
             </a:r>
             <a:endParaRPr lang="en-US" sz="2800" dirty="0"/>
           </a:p>
@@ -25195,7 +25000,7 @@
                 <a:ea typeface="Trebuchet MS" pitchFamily="34" charset="-122"/>
                 <a:cs typeface="Trebuchet MS" pitchFamily="34" charset="-120"/>
               </a:rPr>
-              <a:t>dark</a:t>
+              <a:t>still</a:t>
             </a:r>
             <a:endParaRPr lang="en-US" sz="1300" dirty="0"/>
           </a:p>
@@ -25234,7 +25039,7 @@
                 <a:ea typeface="Calibri" pitchFamily="34" charset="-122"/>
                 <a:cs typeface="Calibri" pitchFamily="34" charset="-120"/>
               </a:rPr>
-              <a:t>without light</a:t>
+              <a:t>not moving, quiet</a:t>
             </a:r>
             <a:endParaRPr lang="en-US" sz="850" dirty="0"/>
           </a:p>
@@ -25346,7 +25151,7 @@
                 <a:ea typeface="Calibri" pitchFamily="34" charset="-122"/>
                 <a:cs typeface="Calibri" pitchFamily="34" charset="-120"/>
               </a:rPr>
-              <a:t>state or quality of</a:t>
+              <a:t>state or quality of being</a:t>
             </a:r>
             <a:endParaRPr lang="en-US" sz="850" dirty="0"/>
           </a:p>
@@ -25505,7 +25310,7 @@
                 <a:ea typeface="Trebuchet MS" pitchFamily="34" charset="-122"/>
                 <a:cs typeface="Trebuchet MS" pitchFamily="34" charset="-120"/>
               </a:rPr>
-              <a:t>dark</a:t>
+              <a:t>still</a:t>
             </a:r>
             <a:endParaRPr lang="en-US" sz="1400" dirty="0"/>
           </a:p>
@@ -26034,7 +25839,7 @@
                 <a:ea typeface="Calibri" pitchFamily="34" charset="-122"/>
                 <a:cs typeface="Calibri" pitchFamily="34" charset="-120"/>
               </a:rPr>
-              <a:t>Word Labs  •  wordlabs.app  •  Suffix: '-ness' = state or quality of</a:t>
+              <a:t>Word Labs  •  wordlabs.app  •  Suffix: '-ness' = state or quality of being</a:t>
             </a:r>
             <a:endParaRPr lang="en-US" sz="800" dirty="0"/>
           </a:p>
@@ -26173,7 +25978,7 @@
                 <a:ea typeface="Trebuchet MS" pitchFamily="34" charset="-122"/>
                 <a:cs typeface="Trebuchet MS" pitchFamily="34" charset="-120"/>
               </a:rPr>
-              <a:t>darkness</a:t>
+              <a:t>stillness</a:t>
             </a:r>
             <a:endParaRPr lang="en-US" sz="2800" dirty="0"/>
           </a:p>
@@ -26312,7 +26117,7 @@
                 <a:ea typeface="Trebuchet MS" pitchFamily="34" charset="-122"/>
                 <a:cs typeface="Trebuchet MS" pitchFamily="34" charset="-120"/>
               </a:rPr>
-              <a:t>dark</a:t>
+              <a:t>still</a:t>
             </a:r>
             <a:endParaRPr lang="en-US" sz="1300" dirty="0"/>
           </a:p>
@@ -26351,7 +26156,7 @@
                 <a:ea typeface="Calibri" pitchFamily="34" charset="-122"/>
                 <a:cs typeface="Calibri" pitchFamily="34" charset="-120"/>
               </a:rPr>
-              <a:t>without light</a:t>
+              <a:t>not moving, quiet</a:t>
             </a:r>
             <a:endParaRPr lang="en-US" sz="850" dirty="0"/>
           </a:p>
@@ -26463,7 +26268,7 @@
                 <a:ea typeface="Calibri" pitchFamily="34" charset="-122"/>
                 <a:cs typeface="Calibri" pitchFamily="34" charset="-120"/>
               </a:rPr>
-              <a:t>state or quality of</a:t>
+              <a:t>state or quality of being</a:t>
             </a:r>
             <a:endParaRPr lang="en-US" sz="850" dirty="0"/>
           </a:p>
@@ -26622,7 +26427,7 @@
                 <a:ea typeface="Trebuchet MS" pitchFamily="34" charset="-122"/>
                 <a:cs typeface="Trebuchet MS" pitchFamily="34" charset="-120"/>
               </a:rPr>
-              <a:t>dark</a:t>
+              <a:t>still</a:t>
             </a:r>
             <a:endParaRPr lang="en-US" sz="1400" dirty="0"/>
           </a:p>
@@ -26808,11 +26613,11 @@
         <p:spPr>
           <a:xfrm>
             <a:off x="1874520" y="4096512"/>
-            <a:ext cx="6903720" cy="804672"/>
+            <a:ext cx="6903720" cy="658368"/>
           </a:xfrm>
           <a:prstGeom prst="rect">
             <a:avLst>
-              <a:gd name="adj" fmla="val 6818"/>
+              <a:gd name="adj" fmla="val 8333"/>
             </a:avLst>
           </a:prstGeom>
           <a:solidFill>
@@ -26834,12 +26639,12 @@
         </p:nvSpPr>
         <p:spPr>
           <a:xfrm>
-            <a:off x="2254649" y="4169664"/>
-            <a:ext cx="685800" cy="384048"/>
+            <a:off x="2124837" y="4169664"/>
+            <a:ext cx="685800" cy="475488"/>
           </a:xfrm>
           <a:prstGeom prst="rect">
             <a:avLst>
-              <a:gd name="adj" fmla="val 9524"/>
+              <a:gd name="adj" fmla="val 7692"/>
             </a:avLst>
           </a:prstGeom>
           <a:solidFill>
@@ -26861,8 +26666,8 @@
         </p:nvSpPr>
         <p:spPr>
           <a:xfrm>
-            <a:off x="2254649" y="4169664"/>
-            <a:ext cx="685800" cy="384048"/>
+            <a:off x="2124837" y="4169664"/>
+            <a:ext cx="685800" cy="475488"/>
           </a:xfrm>
           <a:prstGeom prst="rect">
             <a:avLst/>
@@ -26886,7 +26691,7 @@
                 <a:ea typeface="Trebuchet MS" pitchFamily="34" charset="-122"/>
                 <a:cs typeface="Trebuchet MS" pitchFamily="34" charset="-120"/>
               </a:rPr>
-              <a:t>d</a:t>
+              <a:t>s</a:t>
             </a:r>
             <a:endParaRPr lang="en-US" sz="900" dirty="0"/>
           </a:p>
@@ -26900,12 +26705,12 @@
         </p:nvSpPr>
         <p:spPr>
           <a:xfrm>
-            <a:off x="3293146" y="4169664"/>
-            <a:ext cx="685800" cy="384048"/>
+            <a:off x="3033522" y="4169664"/>
+            <a:ext cx="685800" cy="475488"/>
           </a:xfrm>
           <a:prstGeom prst="rect">
             <a:avLst>
-              <a:gd name="adj" fmla="val 9524"/>
+              <a:gd name="adj" fmla="val 7692"/>
             </a:avLst>
           </a:prstGeom>
           <a:solidFill>
@@ -26927,8 +26732,8 @@
         </p:nvSpPr>
         <p:spPr>
           <a:xfrm>
-            <a:off x="3293146" y="4169664"/>
-            <a:ext cx="685800" cy="384048"/>
+            <a:off x="3033522" y="4169664"/>
+            <a:ext cx="685800" cy="475488"/>
           </a:xfrm>
           <a:prstGeom prst="rect">
             <a:avLst/>
@@ -26952,7 +26757,7 @@
                 <a:ea typeface="Trebuchet MS" pitchFamily="34" charset="-122"/>
                 <a:cs typeface="Trebuchet MS" pitchFamily="34" charset="-120"/>
               </a:rPr>
-              <a:t>ar</a:t>
+              <a:t>t</a:t>
             </a:r>
             <a:endParaRPr lang="en-US" sz="900" dirty="0"/>
           </a:p>
@@ -26966,12 +26771,12 @@
         </p:nvSpPr>
         <p:spPr>
           <a:xfrm>
-            <a:off x="4331643" y="4169664"/>
-            <a:ext cx="685800" cy="384048"/>
+            <a:off x="3942207" y="4169664"/>
+            <a:ext cx="685800" cy="475488"/>
           </a:xfrm>
           <a:prstGeom prst="rect">
             <a:avLst>
-              <a:gd name="adj" fmla="val 9524"/>
+              <a:gd name="adj" fmla="val 7692"/>
             </a:avLst>
           </a:prstGeom>
           <a:solidFill>
@@ -26993,8 +26798,8 @@
         </p:nvSpPr>
         <p:spPr>
           <a:xfrm>
-            <a:off x="4331643" y="4169664"/>
-            <a:ext cx="685800" cy="384048"/>
+            <a:off x="3942207" y="4169664"/>
+            <a:ext cx="685800" cy="475488"/>
           </a:xfrm>
           <a:prstGeom prst="rect">
             <a:avLst/>
@@ -27018,7 +26823,7 @@
                 <a:ea typeface="Trebuchet MS" pitchFamily="34" charset="-122"/>
                 <a:cs typeface="Trebuchet MS" pitchFamily="34" charset="-120"/>
               </a:rPr>
-              <a:t>k</a:t>
+              <a:t>i</a:t>
             </a:r>
             <a:endParaRPr lang="en-US" sz="900" dirty="0"/>
           </a:p>
@@ -27032,12 +26837,12 @@
         </p:nvSpPr>
         <p:spPr>
           <a:xfrm>
-            <a:off x="5370141" y="4169664"/>
-            <a:ext cx="685800" cy="384048"/>
+            <a:off x="4850892" y="4169664"/>
+            <a:ext cx="685800" cy="475488"/>
           </a:xfrm>
           <a:prstGeom prst="rect">
             <a:avLst>
-              <a:gd name="adj" fmla="val 9524"/>
+              <a:gd name="adj" fmla="val 7692"/>
             </a:avLst>
           </a:prstGeom>
           <a:solidFill>
@@ -27059,8 +26864,8 @@
         </p:nvSpPr>
         <p:spPr>
           <a:xfrm>
-            <a:off x="5370141" y="4169664"/>
-            <a:ext cx="685800" cy="384048"/>
+            <a:off x="4850892" y="4169664"/>
+            <a:ext cx="685800" cy="475488"/>
           </a:xfrm>
           <a:prstGeom prst="rect">
             <a:avLst/>
@@ -27084,7 +26889,7 @@
                 <a:ea typeface="Trebuchet MS" pitchFamily="34" charset="-122"/>
                 <a:cs typeface="Trebuchet MS" pitchFamily="34" charset="-120"/>
               </a:rPr>
-              <a:t>n</a:t>
+              <a:t>ll</a:t>
             </a:r>
             <a:endParaRPr lang="en-US" sz="900" dirty="0"/>
           </a:p>
@@ -27098,12 +26903,12 @@
         </p:nvSpPr>
         <p:spPr>
           <a:xfrm>
-            <a:off x="6408638" y="4169664"/>
-            <a:ext cx="685800" cy="384048"/>
+            <a:off x="5759577" y="4169664"/>
+            <a:ext cx="685800" cy="475488"/>
           </a:xfrm>
           <a:prstGeom prst="rect">
             <a:avLst>
-              <a:gd name="adj" fmla="val 9524"/>
+              <a:gd name="adj" fmla="val 7692"/>
             </a:avLst>
           </a:prstGeom>
           <a:solidFill>
@@ -27125,8 +26930,8 @@
         </p:nvSpPr>
         <p:spPr>
           <a:xfrm>
-            <a:off x="6408638" y="4169664"/>
-            <a:ext cx="685800" cy="384048"/>
+            <a:off x="5759577" y="4169664"/>
+            <a:ext cx="685800" cy="475488"/>
           </a:xfrm>
           <a:prstGeom prst="rect">
             <a:avLst/>
@@ -27150,7 +26955,7 @@
                 <a:ea typeface="Trebuchet MS" pitchFamily="34" charset="-122"/>
                 <a:cs typeface="Trebuchet MS" pitchFamily="34" charset="-120"/>
               </a:rPr>
-              <a:t>e</a:t>
+              <a:t>n</a:t>
             </a:r>
             <a:endParaRPr lang="en-US" sz="900" dirty="0"/>
           </a:p>
@@ -27164,12 +26969,12 @@
         </p:nvSpPr>
         <p:spPr>
           <a:xfrm>
-            <a:off x="7447135" y="4169664"/>
-            <a:ext cx="685800" cy="384048"/>
+            <a:off x="6668262" y="4169664"/>
+            <a:ext cx="685800" cy="475488"/>
           </a:xfrm>
           <a:prstGeom prst="rect">
             <a:avLst>
-              <a:gd name="adj" fmla="val 9524"/>
+              <a:gd name="adj" fmla="val 7692"/>
             </a:avLst>
           </a:prstGeom>
           <a:solidFill>
@@ -27191,8 +26996,8 @@
         </p:nvSpPr>
         <p:spPr>
           <a:xfrm>
-            <a:off x="7447135" y="4169664"/>
-            <a:ext cx="685800" cy="384048"/>
+            <a:off x="6668262" y="4169664"/>
+            <a:ext cx="685800" cy="475488"/>
           </a:xfrm>
           <a:prstGeom prst="rect">
             <a:avLst/>
@@ -27216,48 +27021,75 @@
                 <a:ea typeface="Trebuchet MS" pitchFamily="34" charset="-122"/>
                 <a:cs typeface="Trebuchet MS" pitchFamily="34" charset="-120"/>
               </a:rPr>
+              <a:t>e</a:t>
+            </a:r>
+            <a:endParaRPr lang="en-US" sz="900" dirty="0"/>
+          </a:p>
+        </p:txBody>
+      </p:sp>
+      <p:sp>
+        <p:nvSpPr>
+          <p:cNvPr id="45" name="Shape 43"/>
+          <p:cNvSpPr/>
+          <p:nvPr/>
+        </p:nvSpPr>
+        <p:spPr>
+          <a:xfrm>
+            <a:off x="7576947" y="4169664"/>
+            <a:ext cx="685800" cy="475488"/>
+          </a:xfrm>
+          <a:prstGeom prst="rect">
+            <a:avLst>
+              <a:gd name="adj" fmla="val 7692"/>
+            </a:avLst>
+          </a:prstGeom>
+          <a:solidFill>
+            <a:srgbClr val="FFFFFF"/>
+          </a:solidFill>
+          <a:ln w="12700">
+            <a:solidFill>
+              <a:srgbClr val="DB2777"/>
+            </a:solidFill>
+            <a:prstDash val="solid"/>
+          </a:ln>
+        </p:spPr>
+      </p:sp>
+      <p:sp>
+        <p:nvSpPr>
+          <p:cNvPr id="46" name="Text 44"/>
+          <p:cNvSpPr/>
+          <p:nvPr/>
+        </p:nvSpPr>
+        <p:spPr>
+          <a:xfrm>
+            <a:off x="7576947" y="4169664"/>
+            <a:ext cx="685800" cy="475488"/>
+          </a:xfrm>
+          <a:prstGeom prst="rect">
+            <a:avLst/>
+          </a:prstGeom>
+          <a:noFill/>
+          <a:ln/>
+        </p:spPr>
+        <p:txBody>
+          <a:bodyPr wrap="square" lIns="0" tIns="0" rIns="0" bIns="0" rtlCol="0" anchor="ctr"/>
+          <a:lstStyle/>
+          <a:p>
+            <a:pPr algn="ctr" indent="0" marL="0">
+              <a:buNone/>
+            </a:pPr>
+            <a:r>
+              <a:rPr lang="en-US" sz="900" b="1" dirty="0">
+                <a:solidFill>
+                  <a:srgbClr val="9D174D"/>
+                </a:solidFill>
+                <a:latin typeface="Trebuchet MS" pitchFamily="34" charset="0"/>
+                <a:ea typeface="Trebuchet MS" pitchFamily="34" charset="-122"/>
+                <a:cs typeface="Trebuchet MS" pitchFamily="34" charset="-120"/>
+              </a:rPr>
               <a:t>ss</a:t>
             </a:r>
             <a:endParaRPr lang="en-US" sz="900" dirty="0"/>
-          </a:p>
-        </p:txBody>
-      </p:sp>
-      <p:sp>
-        <p:nvSpPr>
-          <p:cNvPr id="45" name="Text 43"/>
-          <p:cNvSpPr/>
-          <p:nvPr/>
-        </p:nvSpPr>
-        <p:spPr>
-          <a:xfrm>
-            <a:off x="7447135" y="4572000"/>
-            <a:ext cx="685800" cy="219456"/>
-          </a:xfrm>
-          <a:prstGeom prst="rect">
-            <a:avLst/>
-          </a:prstGeom>
-          <a:noFill/>
-          <a:ln/>
-        </p:spPr>
-        <p:txBody>
-          <a:bodyPr wrap="square" lIns="0" tIns="0" rIns="0" bIns="0" rtlCol="0" anchor="t"/>
-          <a:lstStyle/>
-          <a:p>
-            <a:pPr algn="ctr" indent="0" marL="0">
-              <a:buNone/>
-            </a:pPr>
-            <a:r>
-              <a:rPr lang="en-US" sz="750" i="1" dirty="0">
-                <a:solidFill>
-                  <a:srgbClr val="94A3B8"/>
-                </a:solidFill>
-                <a:latin typeface="Calibri" pitchFamily="34" charset="0"/>
-                <a:ea typeface="Calibri" pitchFamily="34" charset="-122"/>
-                <a:cs typeface="Calibri" pitchFamily="34" charset="-120"/>
-              </a:rPr>
-              <a:t>/s/</a:t>
-            </a:r>
-            <a:endParaRPr lang="en-US" sz="750" dirty="0"/>
           </a:p>
         </p:txBody>
       </p:sp>
@@ -27547,7 +27379,7 @@
                 <a:ea typeface="Calibri" pitchFamily="34" charset="-122"/>
                 <a:cs typeface="Calibri" pitchFamily="34" charset="-120"/>
               </a:rPr>
-              <a:t>Word Labs  •  wordlabs.app  •  Suffix: '-ness' = state or quality of</a:t>
+              <a:t>Word Labs  •  wordlabs.app  •  Suffix: '-ness' = state or quality of being</a:t>
             </a:r>
             <a:endParaRPr lang="en-US" sz="800" dirty="0"/>
           </a:p>
@@ -27686,7 +27518,7 @@
                 <a:ea typeface="Trebuchet MS" pitchFamily="34" charset="-122"/>
                 <a:cs typeface="Trebuchet MS" pitchFamily="34" charset="-120"/>
               </a:rPr>
-              <a:t>calmness</a:t>
+              <a:t>sadness</a:t>
             </a:r>
             <a:endParaRPr lang="en-US" sz="2800" dirty="0"/>
           </a:p>
@@ -28374,7 +28206,7 @@
                 <a:ea typeface="Calibri" pitchFamily="34" charset="-122"/>
                 <a:cs typeface="Calibri" pitchFamily="34" charset="-120"/>
               </a:rPr>
-              <a:t>Word Labs  •  wordlabs.app  •  Suffix: '-ness' = state or quality of</a:t>
+              <a:t>Word Labs  •  wordlabs.app  •  Suffix: '-ness' = state or quality of being</a:t>
             </a:r>
             <a:endParaRPr lang="en-US" sz="800" dirty="0"/>
           </a:p>
@@ -28513,7 +28345,7 @@
                 <a:ea typeface="Trebuchet MS" pitchFamily="34" charset="-122"/>
                 <a:cs typeface="Trebuchet MS" pitchFamily="34" charset="-120"/>
               </a:rPr>
-              <a:t>calmness</a:t>
+              <a:t>sadness</a:t>
             </a:r>
             <a:endParaRPr lang="en-US" sz="2800" dirty="0"/>
           </a:p>
@@ -28652,7 +28484,7 @@
                 <a:ea typeface="Trebuchet MS" pitchFamily="34" charset="-122"/>
                 <a:cs typeface="Trebuchet MS" pitchFamily="34" charset="-120"/>
               </a:rPr>
-              <a:t>calm</a:t>
+              <a:t>sad</a:t>
             </a:r>
             <a:endParaRPr lang="en-US" sz="1300" dirty="0"/>
           </a:p>
@@ -28691,7 +28523,7 @@
                 <a:ea typeface="Calibri" pitchFamily="34" charset="-122"/>
                 <a:cs typeface="Calibri" pitchFamily="34" charset="-120"/>
               </a:rPr>
-              <a:t>peaceful and not worried</a:t>
+              <a:t>feeling unhappy</a:t>
             </a:r>
             <a:endParaRPr lang="en-US" sz="850" dirty="0"/>
           </a:p>
@@ -28803,7 +28635,7 @@
                 <a:ea typeface="Calibri" pitchFamily="34" charset="-122"/>
                 <a:cs typeface="Calibri" pitchFamily="34" charset="-120"/>
               </a:rPr>
-              <a:t>state or quality of</a:t>
+              <a:t>state or quality of being</a:t>
             </a:r>
             <a:endParaRPr lang="en-US" sz="850" dirty="0"/>
           </a:p>
@@ -29359,7 +29191,7 @@
                 <a:ea typeface="Calibri" pitchFamily="34" charset="-122"/>
                 <a:cs typeface="Calibri" pitchFamily="34" charset="-120"/>
               </a:rPr>
-              <a:t>Word Labs  •  wordlabs.app  •  Suffix: '-ness' = state or quality of</a:t>
+              <a:t>Word Labs  •  wordlabs.app  •  Suffix: '-ness' = state or quality of being</a:t>
             </a:r>
             <a:endParaRPr lang="en-US" sz="800" dirty="0"/>
           </a:p>
@@ -29498,7 +29330,7 @@
                 <a:ea typeface="Trebuchet MS" pitchFamily="34" charset="-122"/>
                 <a:cs typeface="Trebuchet MS" pitchFamily="34" charset="-120"/>
               </a:rPr>
-              <a:t>calmness</a:t>
+              <a:t>sadness</a:t>
             </a:r>
             <a:endParaRPr lang="en-US" sz="2800" dirty="0"/>
           </a:p>
@@ -29637,7 +29469,7 @@
                 <a:ea typeface="Trebuchet MS" pitchFamily="34" charset="-122"/>
                 <a:cs typeface="Trebuchet MS" pitchFamily="34" charset="-120"/>
               </a:rPr>
-              <a:t>calm</a:t>
+              <a:t>sad</a:t>
             </a:r>
             <a:endParaRPr lang="en-US" sz="1300" dirty="0"/>
           </a:p>
@@ -29676,7 +29508,7 @@
                 <a:ea typeface="Calibri" pitchFamily="34" charset="-122"/>
                 <a:cs typeface="Calibri" pitchFamily="34" charset="-120"/>
               </a:rPr>
-              <a:t>peaceful and not worried</a:t>
+              <a:t>feeling unhappy</a:t>
             </a:r>
             <a:endParaRPr lang="en-US" sz="850" dirty="0"/>
           </a:p>
@@ -29788,7 +29620,7 @@
                 <a:ea typeface="Calibri" pitchFamily="34" charset="-122"/>
                 <a:cs typeface="Calibri" pitchFamily="34" charset="-120"/>
               </a:rPr>
-              <a:t>state or quality of</a:t>
+              <a:t>state or quality of being</a:t>
             </a:r>
             <a:endParaRPr lang="en-US" sz="850" dirty="0"/>
           </a:p>
@@ -29947,7 +29779,7 @@
                 <a:ea typeface="Trebuchet MS" pitchFamily="34" charset="-122"/>
                 <a:cs typeface="Trebuchet MS" pitchFamily="34" charset="-120"/>
               </a:rPr>
-              <a:t>calm</a:t>
+              <a:t>sad</a:t>
             </a:r>
             <a:endParaRPr lang="en-US" sz="1400" dirty="0"/>
           </a:p>
@@ -30476,7 +30308,7 @@
                 <a:ea typeface="Calibri" pitchFamily="34" charset="-122"/>
                 <a:cs typeface="Calibri" pitchFamily="34" charset="-120"/>
               </a:rPr>
-              <a:t>Word Labs  •  wordlabs.app  •  Suffix: '-ness' = state or quality of</a:t>
+              <a:t>Word Labs  •  wordlabs.app  •  Suffix: '-ness' = state or quality of being</a:t>
             </a:r>
             <a:endParaRPr lang="en-US" sz="800" dirty="0"/>
           </a:p>
@@ -30615,7 +30447,7 @@
                 <a:ea typeface="Trebuchet MS" pitchFamily="34" charset="-122"/>
                 <a:cs typeface="Trebuchet MS" pitchFamily="34" charset="-120"/>
               </a:rPr>
-              <a:t>calmness</a:t>
+              <a:t>sadness</a:t>
             </a:r>
             <a:endParaRPr lang="en-US" sz="2800" dirty="0"/>
           </a:p>
@@ -30754,7 +30586,7 @@
                 <a:ea typeface="Trebuchet MS" pitchFamily="34" charset="-122"/>
                 <a:cs typeface="Trebuchet MS" pitchFamily="34" charset="-120"/>
               </a:rPr>
-              <a:t>calm</a:t>
+              <a:t>sad</a:t>
             </a:r>
             <a:endParaRPr lang="en-US" sz="1300" dirty="0"/>
           </a:p>
@@ -30793,7 +30625,7 @@
                 <a:ea typeface="Calibri" pitchFamily="34" charset="-122"/>
                 <a:cs typeface="Calibri" pitchFamily="34" charset="-120"/>
               </a:rPr>
-              <a:t>peaceful and not worried</a:t>
+              <a:t>feeling unhappy</a:t>
             </a:r>
             <a:endParaRPr lang="en-US" sz="850" dirty="0"/>
           </a:p>
@@ -30905,7 +30737,7 @@
                 <a:ea typeface="Calibri" pitchFamily="34" charset="-122"/>
                 <a:cs typeface="Calibri" pitchFamily="34" charset="-120"/>
               </a:rPr>
-              <a:t>state or quality of</a:t>
+              <a:t>state or quality of being</a:t>
             </a:r>
             <a:endParaRPr lang="en-US" sz="850" dirty="0"/>
           </a:p>
@@ -31064,7 +30896,7 @@
                 <a:ea typeface="Trebuchet MS" pitchFamily="34" charset="-122"/>
                 <a:cs typeface="Trebuchet MS" pitchFamily="34" charset="-120"/>
               </a:rPr>
-              <a:t>calm</a:t>
+              <a:t>sad</a:t>
             </a:r>
             <a:endParaRPr lang="en-US" sz="1400" dirty="0"/>
           </a:p>
@@ -31250,11 +31082,11 @@
         <p:spPr>
           <a:xfrm>
             <a:off x="1874520" y="4096512"/>
-            <a:ext cx="6903720" cy="804672"/>
+            <a:ext cx="6903720" cy="658368"/>
           </a:xfrm>
           <a:prstGeom prst="rect">
             <a:avLst>
-              <a:gd name="adj" fmla="val 6818"/>
+              <a:gd name="adj" fmla="val 8333"/>
             </a:avLst>
           </a:prstGeom>
           <a:solidFill>
@@ -31276,12 +31108,12 @@
         </p:nvSpPr>
         <p:spPr>
           <a:xfrm>
-            <a:off x="2124837" y="4169664"/>
-            <a:ext cx="685800" cy="384048"/>
+            <a:off x="2254649" y="4169664"/>
+            <a:ext cx="685800" cy="475488"/>
           </a:xfrm>
           <a:prstGeom prst="rect">
             <a:avLst>
-              <a:gd name="adj" fmla="val 9524"/>
+              <a:gd name="adj" fmla="val 7692"/>
             </a:avLst>
           </a:prstGeom>
           <a:solidFill>
@@ -31303,8 +31135,8 @@
         </p:nvSpPr>
         <p:spPr>
           <a:xfrm>
-            <a:off x="2124837" y="4169664"/>
-            <a:ext cx="685800" cy="384048"/>
+            <a:off x="2254649" y="4169664"/>
+            <a:ext cx="685800" cy="475488"/>
           </a:xfrm>
           <a:prstGeom prst="rect">
             <a:avLst/>
@@ -31328,7 +31160,7 @@
                 <a:ea typeface="Trebuchet MS" pitchFamily="34" charset="-122"/>
                 <a:cs typeface="Trebuchet MS" pitchFamily="34" charset="-120"/>
               </a:rPr>
-              <a:t>c</a:t>
+              <a:t>s</a:t>
             </a:r>
             <a:endParaRPr lang="en-US" sz="900" dirty="0"/>
           </a:p>
@@ -31336,57 +31168,18 @@
       </p:sp>
       <p:sp>
         <p:nvSpPr>
-          <p:cNvPr id="35" name="Text 33"/>
-          <p:cNvSpPr/>
-          <p:nvPr/>
-        </p:nvSpPr>
-        <p:spPr>
-          <a:xfrm>
-            <a:off x="2124837" y="4572000"/>
-            <a:ext cx="685800" cy="219456"/>
-          </a:xfrm>
-          <a:prstGeom prst="rect">
-            <a:avLst/>
-          </a:prstGeom>
-          <a:noFill/>
-          <a:ln/>
-        </p:spPr>
-        <p:txBody>
-          <a:bodyPr wrap="square" lIns="0" tIns="0" rIns="0" bIns="0" rtlCol="0" anchor="t"/>
-          <a:lstStyle/>
-          <a:p>
-            <a:pPr algn="ctr" indent="0" marL="0">
-              <a:buNone/>
-            </a:pPr>
-            <a:r>
-              <a:rPr lang="en-US" sz="750" i="1" dirty="0">
-                <a:solidFill>
-                  <a:srgbClr val="94A3B8"/>
-                </a:solidFill>
-                <a:latin typeface="Calibri" pitchFamily="34" charset="0"/>
-                <a:ea typeface="Calibri" pitchFamily="34" charset="-122"/>
-                <a:cs typeface="Calibri" pitchFamily="34" charset="-120"/>
-              </a:rPr>
-              <a:t>/k/</a:t>
-            </a:r>
-            <a:endParaRPr lang="en-US" sz="750" dirty="0"/>
-          </a:p>
-        </p:txBody>
-      </p:sp>
-      <p:sp>
-        <p:nvSpPr>
-          <p:cNvPr id="36" name="Shape 34"/>
-          <p:cNvSpPr/>
-          <p:nvPr/>
-        </p:nvSpPr>
-        <p:spPr>
-          <a:xfrm>
-            <a:off x="3033522" y="4169664"/>
-            <a:ext cx="685800" cy="384048"/>
+          <p:cNvPr id="35" name="Shape 33"/>
+          <p:cNvSpPr/>
+          <p:nvPr/>
+        </p:nvSpPr>
+        <p:spPr>
+          <a:xfrm>
+            <a:off x="3293146" y="4169664"/>
+            <a:ext cx="685800" cy="475488"/>
           </a:xfrm>
           <a:prstGeom prst="rect">
             <a:avLst>
-              <a:gd name="adj" fmla="val 9524"/>
+              <a:gd name="adj" fmla="val 7692"/>
             </a:avLst>
           </a:prstGeom>
           <a:solidFill>
@@ -31402,14 +31195,14 @@
       </p:sp>
       <p:sp>
         <p:nvSpPr>
-          <p:cNvPr id="37" name="Text 35"/>
-          <p:cNvSpPr/>
-          <p:nvPr/>
-        </p:nvSpPr>
-        <p:spPr>
-          <a:xfrm>
-            <a:off x="3033522" y="4169664"/>
-            <a:ext cx="685800" cy="384048"/>
+          <p:cNvPr id="36" name="Text 34"/>
+          <p:cNvSpPr/>
+          <p:nvPr/>
+        </p:nvSpPr>
+        <p:spPr>
+          <a:xfrm>
+            <a:off x="3293146" y="4169664"/>
+            <a:ext cx="685800" cy="475488"/>
           </a:xfrm>
           <a:prstGeom prst="rect">
             <a:avLst/>
@@ -31441,18 +31234,18 @@
       </p:sp>
       <p:sp>
         <p:nvSpPr>
-          <p:cNvPr id="38" name="Shape 36"/>
-          <p:cNvSpPr/>
-          <p:nvPr/>
-        </p:nvSpPr>
-        <p:spPr>
-          <a:xfrm>
-            <a:off x="3942207" y="4169664"/>
-            <a:ext cx="685800" cy="384048"/>
+          <p:cNvPr id="37" name="Shape 35"/>
+          <p:cNvSpPr/>
+          <p:nvPr/>
+        </p:nvSpPr>
+        <p:spPr>
+          <a:xfrm>
+            <a:off x="4331643" y="4169664"/>
+            <a:ext cx="685800" cy="475488"/>
           </a:xfrm>
           <a:prstGeom prst="rect">
             <a:avLst>
-              <a:gd name="adj" fmla="val 9524"/>
+              <a:gd name="adj" fmla="val 7692"/>
             </a:avLst>
           </a:prstGeom>
           <a:solidFill>
@@ -31468,14 +31261,14 @@
       </p:sp>
       <p:sp>
         <p:nvSpPr>
-          <p:cNvPr id="39" name="Text 37"/>
-          <p:cNvSpPr/>
-          <p:nvPr/>
-        </p:nvSpPr>
-        <p:spPr>
-          <a:xfrm>
-            <a:off x="3942207" y="4169664"/>
-            <a:ext cx="685800" cy="384048"/>
+          <p:cNvPr id="38" name="Text 36"/>
+          <p:cNvSpPr/>
+          <p:nvPr/>
+        </p:nvSpPr>
+        <p:spPr>
+          <a:xfrm>
+            <a:off x="4331643" y="4169664"/>
+            <a:ext cx="685800" cy="475488"/>
           </a:xfrm>
           <a:prstGeom prst="rect">
             <a:avLst/>
@@ -31499,7 +31292,7 @@
                 <a:ea typeface="Trebuchet MS" pitchFamily="34" charset="-122"/>
                 <a:cs typeface="Trebuchet MS" pitchFamily="34" charset="-120"/>
               </a:rPr>
-              <a:t>l</a:t>
+              <a:t>d</a:t>
             </a:r>
             <a:endParaRPr lang="en-US" sz="900" dirty="0"/>
           </a:p>
@@ -31507,80 +31300,41 @@
       </p:sp>
       <p:sp>
         <p:nvSpPr>
+          <p:cNvPr id="39" name="Shape 37"/>
+          <p:cNvSpPr/>
+          <p:nvPr/>
+        </p:nvSpPr>
+        <p:spPr>
+          <a:xfrm>
+            <a:off x="5370141" y="4169664"/>
+            <a:ext cx="685800" cy="475488"/>
+          </a:xfrm>
+          <a:prstGeom prst="rect">
+            <a:avLst>
+              <a:gd name="adj" fmla="val 7692"/>
+            </a:avLst>
+          </a:prstGeom>
+          <a:solidFill>
+            <a:srgbClr val="FFFFFF"/>
+          </a:solidFill>
+          <a:ln w="12700">
+            <a:solidFill>
+              <a:srgbClr val="DB2777"/>
+            </a:solidFill>
+            <a:prstDash val="solid"/>
+          </a:ln>
+        </p:spPr>
+      </p:sp>
+      <p:sp>
+        <p:nvSpPr>
           <p:cNvPr id="40" name="Text 38"/>
           <p:cNvSpPr/>
           <p:nvPr/>
         </p:nvSpPr>
         <p:spPr>
           <a:xfrm>
-            <a:off x="3942207" y="4572000"/>
-            <a:ext cx="685800" cy="219456"/>
-          </a:xfrm>
-          <a:prstGeom prst="rect">
-            <a:avLst/>
-          </a:prstGeom>
-          <a:noFill/>
-          <a:ln/>
-        </p:spPr>
-        <p:txBody>
-          <a:bodyPr wrap="square" lIns="0" tIns="0" rIns="0" bIns="0" rtlCol="0" anchor="t"/>
-          <a:lstStyle/>
-          <a:p>
-            <a:pPr algn="ctr" indent="0" marL="0">
-              <a:buNone/>
-            </a:pPr>
-            <a:r>
-              <a:rPr lang="en-US" sz="750" i="1" dirty="0">
-                <a:solidFill>
-                  <a:srgbClr val="94A3B8"/>
-                </a:solidFill>
-                <a:latin typeface="Calibri" pitchFamily="34" charset="0"/>
-                <a:ea typeface="Calibri" pitchFamily="34" charset="-122"/>
-                <a:cs typeface="Calibri" pitchFamily="34" charset="-120"/>
-              </a:rPr>
-              <a:t>silent</a:t>
-            </a:r>
-            <a:endParaRPr lang="en-US" sz="750" dirty="0"/>
-          </a:p>
-        </p:txBody>
-      </p:sp>
-      <p:sp>
-        <p:nvSpPr>
-          <p:cNvPr id="41" name="Shape 39"/>
-          <p:cNvSpPr/>
-          <p:nvPr/>
-        </p:nvSpPr>
-        <p:spPr>
-          <a:xfrm>
-            <a:off x="4850892" y="4169664"/>
-            <a:ext cx="685800" cy="384048"/>
-          </a:xfrm>
-          <a:prstGeom prst="rect">
-            <a:avLst>
-              <a:gd name="adj" fmla="val 9524"/>
-            </a:avLst>
-          </a:prstGeom>
-          <a:solidFill>
-            <a:srgbClr val="FFFFFF"/>
-          </a:solidFill>
-          <a:ln w="12700">
-            <a:solidFill>
-              <a:srgbClr val="DB2777"/>
-            </a:solidFill>
-            <a:prstDash val="solid"/>
-          </a:ln>
-        </p:spPr>
-      </p:sp>
-      <p:sp>
-        <p:nvSpPr>
-          <p:cNvPr id="42" name="Text 40"/>
-          <p:cNvSpPr/>
-          <p:nvPr/>
-        </p:nvSpPr>
-        <p:spPr>
-          <a:xfrm>
-            <a:off x="4850892" y="4169664"/>
-            <a:ext cx="685800" cy="384048"/>
+            <a:off x="5370141" y="4169664"/>
+            <a:ext cx="685800" cy="475488"/>
           </a:xfrm>
           <a:prstGeom prst="rect">
             <a:avLst/>
@@ -31604,7 +31358,7 @@
                 <a:ea typeface="Trebuchet MS" pitchFamily="34" charset="-122"/>
                 <a:cs typeface="Trebuchet MS" pitchFamily="34" charset="-120"/>
               </a:rPr>
-              <a:t>m</a:t>
+              <a:t>n</a:t>
             </a:r>
             <a:endParaRPr lang="en-US" sz="900" dirty="0"/>
           </a:p>
@@ -31612,18 +31366,18 @@
       </p:sp>
       <p:sp>
         <p:nvSpPr>
-          <p:cNvPr id="43" name="Shape 41"/>
-          <p:cNvSpPr/>
-          <p:nvPr/>
-        </p:nvSpPr>
-        <p:spPr>
-          <a:xfrm>
-            <a:off x="5759577" y="4169664"/>
-            <a:ext cx="685800" cy="384048"/>
+          <p:cNvPr id="41" name="Shape 39"/>
+          <p:cNvSpPr/>
+          <p:nvPr/>
+        </p:nvSpPr>
+        <p:spPr>
+          <a:xfrm>
+            <a:off x="6408638" y="4169664"/>
+            <a:ext cx="685800" cy="475488"/>
           </a:xfrm>
           <a:prstGeom prst="rect">
             <a:avLst>
-              <a:gd name="adj" fmla="val 9524"/>
+              <a:gd name="adj" fmla="val 7692"/>
             </a:avLst>
           </a:prstGeom>
           <a:solidFill>
@@ -31639,14 +31393,14 @@
       </p:sp>
       <p:sp>
         <p:nvSpPr>
-          <p:cNvPr id="44" name="Text 42"/>
-          <p:cNvSpPr/>
-          <p:nvPr/>
-        </p:nvSpPr>
-        <p:spPr>
-          <a:xfrm>
-            <a:off x="5759577" y="4169664"/>
-            <a:ext cx="685800" cy="384048"/>
+          <p:cNvPr id="42" name="Text 40"/>
+          <p:cNvSpPr/>
+          <p:nvPr/>
+        </p:nvSpPr>
+        <p:spPr>
+          <a:xfrm>
+            <a:off x="6408638" y="4169664"/>
+            <a:ext cx="685800" cy="475488"/>
           </a:xfrm>
           <a:prstGeom prst="rect">
             <a:avLst/>
@@ -31670,7 +31424,7 @@
                 <a:ea typeface="Trebuchet MS" pitchFamily="34" charset="-122"/>
                 <a:cs typeface="Trebuchet MS" pitchFamily="34" charset="-120"/>
               </a:rPr>
-              <a:t>n</a:t>
+              <a:t>e</a:t>
             </a:r>
             <a:endParaRPr lang="en-US" sz="900" dirty="0"/>
           </a:p>
@@ -31678,18 +31432,18 @@
       </p:sp>
       <p:sp>
         <p:nvSpPr>
-          <p:cNvPr id="45" name="Shape 43"/>
-          <p:cNvSpPr/>
-          <p:nvPr/>
-        </p:nvSpPr>
-        <p:spPr>
-          <a:xfrm>
-            <a:off x="6668262" y="4169664"/>
-            <a:ext cx="685800" cy="384048"/>
+          <p:cNvPr id="43" name="Shape 41"/>
+          <p:cNvSpPr/>
+          <p:nvPr/>
+        </p:nvSpPr>
+        <p:spPr>
+          <a:xfrm>
+            <a:off x="7447135" y="4169664"/>
+            <a:ext cx="685800" cy="475488"/>
           </a:xfrm>
           <a:prstGeom prst="rect">
             <a:avLst>
-              <a:gd name="adj" fmla="val 9524"/>
+              <a:gd name="adj" fmla="val 7692"/>
             </a:avLst>
           </a:prstGeom>
           <a:solidFill>
@@ -31705,14 +31459,14 @@
       </p:sp>
       <p:sp>
         <p:nvSpPr>
-          <p:cNvPr id="46" name="Text 44"/>
-          <p:cNvSpPr/>
-          <p:nvPr/>
-        </p:nvSpPr>
-        <p:spPr>
-          <a:xfrm>
-            <a:off x="6668262" y="4169664"/>
-            <a:ext cx="685800" cy="384048"/>
+          <p:cNvPr id="44" name="Text 42"/>
+          <p:cNvSpPr/>
+          <p:nvPr/>
+        </p:nvSpPr>
+        <p:spPr>
+          <a:xfrm>
+            <a:off x="7447135" y="4169664"/>
+            <a:ext cx="685800" cy="475488"/>
           </a:xfrm>
           <a:prstGeom prst="rect">
             <a:avLst/>
@@ -31736,114 +31490,9 @@
                 <a:ea typeface="Trebuchet MS" pitchFamily="34" charset="-122"/>
                 <a:cs typeface="Trebuchet MS" pitchFamily="34" charset="-120"/>
               </a:rPr>
-              <a:t>e</a:t>
+              <a:t>ss</a:t>
             </a:r>
             <a:endParaRPr lang="en-US" sz="900" dirty="0"/>
-          </a:p>
-        </p:txBody>
-      </p:sp>
-      <p:sp>
-        <p:nvSpPr>
-          <p:cNvPr id="47" name="Shape 45"/>
-          <p:cNvSpPr/>
-          <p:nvPr/>
-        </p:nvSpPr>
-        <p:spPr>
-          <a:xfrm>
-            <a:off x="7576947" y="4169664"/>
-            <a:ext cx="685800" cy="384048"/>
-          </a:xfrm>
-          <a:prstGeom prst="rect">
-            <a:avLst>
-              <a:gd name="adj" fmla="val 9524"/>
-            </a:avLst>
-          </a:prstGeom>
-          <a:solidFill>
-            <a:srgbClr val="FFFFFF"/>
-          </a:solidFill>
-          <a:ln w="12700">
-            <a:solidFill>
-              <a:srgbClr val="DB2777"/>
-            </a:solidFill>
-            <a:prstDash val="solid"/>
-          </a:ln>
-        </p:spPr>
-      </p:sp>
-      <p:sp>
-        <p:nvSpPr>
-          <p:cNvPr id="48" name="Text 46"/>
-          <p:cNvSpPr/>
-          <p:nvPr/>
-        </p:nvSpPr>
-        <p:spPr>
-          <a:xfrm>
-            <a:off x="7576947" y="4169664"/>
-            <a:ext cx="685800" cy="384048"/>
-          </a:xfrm>
-          <a:prstGeom prst="rect">
-            <a:avLst/>
-          </a:prstGeom>
-          <a:noFill/>
-          <a:ln/>
-        </p:spPr>
-        <p:txBody>
-          <a:bodyPr wrap="square" lIns="0" tIns="0" rIns="0" bIns="0" rtlCol="0" anchor="ctr"/>
-          <a:lstStyle/>
-          <a:p>
-            <a:pPr algn="ctr" indent="0" marL="0">
-              <a:buNone/>
-            </a:pPr>
-            <a:r>
-              <a:rPr lang="en-US" sz="900" b="1" dirty="0">
-                <a:solidFill>
-                  <a:srgbClr val="9D174D"/>
-                </a:solidFill>
-                <a:latin typeface="Trebuchet MS" pitchFamily="34" charset="0"/>
-                <a:ea typeface="Trebuchet MS" pitchFamily="34" charset="-122"/>
-                <a:cs typeface="Trebuchet MS" pitchFamily="34" charset="-120"/>
-              </a:rPr>
-              <a:t>ss</a:t>
-            </a:r>
-            <a:endParaRPr lang="en-US" sz="900" dirty="0"/>
-          </a:p>
-        </p:txBody>
-      </p:sp>
-      <p:sp>
-        <p:nvSpPr>
-          <p:cNvPr id="49" name="Text 47"/>
-          <p:cNvSpPr/>
-          <p:nvPr/>
-        </p:nvSpPr>
-        <p:spPr>
-          <a:xfrm>
-            <a:off x="7576947" y="4572000"/>
-            <a:ext cx="685800" cy="219456"/>
-          </a:xfrm>
-          <a:prstGeom prst="rect">
-            <a:avLst/>
-          </a:prstGeom>
-          <a:noFill/>
-          <a:ln/>
-        </p:spPr>
-        <p:txBody>
-          <a:bodyPr wrap="square" lIns="0" tIns="0" rIns="0" bIns="0" rtlCol="0" anchor="t"/>
-          <a:lstStyle/>
-          <a:p>
-            <a:pPr algn="ctr" indent="0" marL="0">
-              <a:buNone/>
-            </a:pPr>
-            <a:r>
-              <a:rPr lang="en-US" sz="750" i="1" dirty="0">
-                <a:solidFill>
-                  <a:srgbClr val="94A3B8"/>
-                </a:solidFill>
-                <a:latin typeface="Calibri" pitchFamily="34" charset="0"/>
-                <a:ea typeface="Calibri" pitchFamily="34" charset="-122"/>
-                <a:cs typeface="Calibri" pitchFamily="34" charset="-120"/>
-              </a:rPr>
-              <a:t>/s/</a:t>
-            </a:r>
-            <a:endParaRPr lang="en-US" sz="750" dirty="0"/>
           </a:p>
         </p:txBody>
       </p:sp>
@@ -32133,7 +31782,7 @@
                 <a:ea typeface="Calibri" pitchFamily="34" charset="-122"/>
                 <a:cs typeface="Calibri" pitchFamily="34" charset="-120"/>
               </a:rPr>
-              <a:t>Word Labs  •  wordlabs.app  •  Suffix: '-ness' = state or quality of</a:t>
+              <a:t>Word Labs  •  wordlabs.app  •  Suffix: '-ness' = state or quality of being</a:t>
             </a:r>
             <a:endParaRPr lang="en-US" sz="800" dirty="0"/>
           </a:p>
@@ -33302,7 +32951,7 @@
                 <a:ea typeface="Calibri" pitchFamily="34" charset="-122"/>
                 <a:cs typeface="Calibri" pitchFamily="34" charset="-120"/>
               </a:rPr>
-              <a:t>Word Labs  •  wordlabs.app  •  Suffix: '-ness' = state or quality of</a:t>
+              <a:t>Word Labs  •  wordlabs.app  •  Suffix: '-ness' = state or quality of being</a:t>
             </a:r>
             <a:endParaRPr lang="en-US" sz="800" dirty="0"/>
           </a:p>
@@ -33795,7 +33444,7 @@
                 <a:ea typeface="Trebuchet MS" pitchFamily="34" charset="-122"/>
                 <a:cs typeface="Trebuchet MS" pitchFamily="34" charset="-120"/>
               </a:rPr>
-              <a:t>for-</a:t>
+              <a:t>kind-</a:t>
             </a:r>
             <a:endParaRPr lang="en-US" sz="1300" dirty="0"/>
           </a:p>
@@ -33948,7 +33597,7 @@
                 <a:ea typeface="Trebuchet MS" pitchFamily="34" charset="-122"/>
                 <a:cs typeface="Trebuchet MS" pitchFamily="34" charset="-120"/>
               </a:rPr>
-              <a:t>sick-</a:t>
+              <a:t>dark-</a:t>
             </a:r>
             <a:endParaRPr lang="en-US" sz="1300" dirty="0"/>
           </a:p>
@@ -34101,7 +33750,7 @@
                 <a:ea typeface="Trebuchet MS" pitchFamily="34" charset="-122"/>
                 <a:cs typeface="Trebuchet MS" pitchFamily="34" charset="-120"/>
               </a:rPr>
-              <a:t>dark-</a:t>
+              <a:t>sad-</a:t>
             </a:r>
             <a:endParaRPr lang="en-US" sz="1300" dirty="0"/>
           </a:p>
@@ -34165,7 +33814,7 @@
                 <a:ea typeface="Trebuchet MS" pitchFamily="34" charset="-122"/>
                 <a:cs typeface="Trebuchet MS" pitchFamily="34" charset="-120"/>
               </a:rPr>
-              <a:t>soft</a:t>
+              <a:t>sad</a:t>
             </a:r>
             <a:endParaRPr lang="en-US" sz="1300" dirty="0"/>
           </a:p>
@@ -34254,7 +33903,7 @@
                 <a:ea typeface="Trebuchet MS" pitchFamily="34" charset="-122"/>
                 <a:cs typeface="Trebuchet MS" pitchFamily="34" charset="-120"/>
               </a:rPr>
-              <a:t>kind-</a:t>
+              <a:t>sick-</a:t>
             </a:r>
             <a:endParaRPr lang="en-US" sz="1300" dirty="0"/>
           </a:p>
@@ -34318,7 +33967,7 @@
                 <a:ea typeface="Trebuchet MS" pitchFamily="34" charset="-122"/>
                 <a:cs typeface="Trebuchet MS" pitchFamily="34" charset="-120"/>
               </a:rPr>
-              <a:t>bright</a:t>
+              <a:t>sick</a:t>
             </a:r>
             <a:endParaRPr lang="en-US" sz="1300" dirty="0"/>
           </a:p>
@@ -34448,7 +34097,7 @@
                 <a:ea typeface="Trebuchet MS" pitchFamily="34" charset="-122"/>
                 <a:cs typeface="Trebuchet MS" pitchFamily="34" charset="-120"/>
               </a:rPr>
-              <a:t>happiness</a:t>
+              <a:t>kindness</a:t>
             </a:r>
             <a:endParaRPr lang="en-US" sz="1200" dirty="0"/>
           </a:p>
@@ -34514,7 +34163,7 @@
                 <a:ea typeface="Trebuchet MS" pitchFamily="34" charset="-122"/>
                 <a:cs typeface="Trebuchet MS" pitchFamily="34" charset="-120"/>
               </a:rPr>
-              <a:t>kindness</a:t>
+              <a:t>darkness</a:t>
             </a:r>
             <a:endParaRPr lang="en-US" sz="1200" dirty="0"/>
           </a:p>
@@ -34580,7 +34229,7 @@
                 <a:ea typeface="Trebuchet MS" pitchFamily="34" charset="-122"/>
                 <a:cs typeface="Trebuchet MS" pitchFamily="34" charset="-120"/>
               </a:rPr>
-              <a:t>darkness</a:t>
+              <a:t>happiness</a:t>
             </a:r>
             <a:endParaRPr lang="en-US" sz="1200" dirty="0"/>
           </a:p>
@@ -34646,7 +34295,7 @@
                 <a:ea typeface="Trebuchet MS" pitchFamily="34" charset="-122"/>
                 <a:cs typeface="Trebuchet MS" pitchFamily="34" charset="-120"/>
               </a:rPr>
-              <a:t>softness</a:t>
+              <a:t>sadness</a:t>
             </a:r>
             <a:endParaRPr lang="en-US" sz="1200" dirty="0"/>
           </a:p>
@@ -34712,7 +34361,7 @@
                 <a:ea typeface="Trebuchet MS" pitchFamily="34" charset="-122"/>
                 <a:cs typeface="Trebuchet MS" pitchFamily="34" charset="-120"/>
               </a:rPr>
-              <a:t>brightness</a:t>
+              <a:t>sickness</a:t>
             </a:r>
             <a:endParaRPr lang="en-US" sz="1200" dirty="0"/>
           </a:p>
@@ -34778,7 +34427,7 @@
                 <a:ea typeface="Trebuchet MS" pitchFamily="34" charset="-122"/>
                 <a:cs typeface="Trebuchet MS" pitchFamily="34" charset="-120"/>
               </a:rPr>
-              <a:t>sadness</a:t>
+              <a:t>softness</a:t>
             </a:r>
             <a:endParaRPr lang="en-US" sz="1200" dirty="0"/>
           </a:p>
@@ -34844,7 +34493,7 @@
                 <a:ea typeface="Trebuchet MS" pitchFamily="34" charset="-122"/>
                 <a:cs typeface="Trebuchet MS" pitchFamily="34" charset="-120"/>
               </a:rPr>
-              <a:t>illness</a:t>
+              <a:t>loudness</a:t>
             </a:r>
             <a:endParaRPr lang="en-US" sz="1200" dirty="0"/>
           </a:p>
@@ -34910,7 +34559,7 @@
                 <a:ea typeface="Trebuchet MS" pitchFamily="34" charset="-122"/>
                 <a:cs typeface="Trebuchet MS" pitchFamily="34" charset="-120"/>
               </a:rPr>
-              <a:t>boldness</a:t>
+              <a:t>stillness</a:t>
             </a:r>
             <a:endParaRPr lang="en-US" sz="1200" dirty="0"/>
           </a:p>
@@ -35202,7 +34851,7 @@
                 <a:ea typeface="Calibri" pitchFamily="34" charset="-122"/>
                 <a:cs typeface="Calibri" pitchFamily="34" charset="-120"/>
               </a:rPr>
-              <a:t>Word Labs  •  wordlabs.app  •  Suffix: '-ness' = state or quality of</a:t>
+              <a:t>Word Labs  •  wordlabs.app  •  Suffix: '-ness' = state or quality of being</a:t>
             </a:r>
             <a:endParaRPr lang="en-US" sz="800" dirty="0"/>
           </a:p>
@@ -35366,7 +35015,7 @@
                 <a:ea typeface="Calibri" pitchFamily="34" charset="-122"/>
                 <a:cs typeface="Calibri" pitchFamily="34" charset="-120"/>
               </a:rPr>
-              <a:t>A meaningful word part added to the end of a word to change its meaning or form. The suffix '-ness' means 'state or quality of'.</a:t>
+              <a:t>A meaningful word part added to the end of a word to change its meaning or form. The suffix '-ness' means 'state or quality of being'.</a:t>
             </a:r>
             <a:endParaRPr lang="en-US" sz="1350" dirty="0"/>
           </a:p>
@@ -35530,7 +35179,7 @@
                 <a:ea typeface="Calibri" pitchFamily="34" charset="-122"/>
                 <a:cs typeface="Calibri" pitchFamily="34" charset="-120"/>
               </a:rPr>
-              <a:t>The core part of a word carrying its basic meaning. In 'happiness', the root is the part before the suffix '-ness'.</a:t>
+              <a:t>The core part of a word carrying its basic meaning. In 'kindness', the root is the part before the suffix '-ness'.</a:t>
             </a:r>
             <a:endParaRPr lang="en-US" sz="1350" dirty="0"/>
           </a:p>
@@ -35694,7 +35343,7 @@
                 <a:ea typeface="Calibri" pitchFamily="34" charset="-122"/>
                 <a:cs typeface="Calibri" pitchFamily="34" charset="-120"/>
               </a:rPr>
-              <a:t>A meaningful word part added to the beginning of a root to change its meaning. E.g. 'un-' in 'kindness' means 'not'.</a:t>
+              <a:t>A meaningful word part added to the beginning of a root to change its meaning. E.g. 'un-' in 'darkness' means 'not'.</a:t>
             </a:r>
             <a:endParaRPr lang="en-US" sz="1350" dirty="0"/>
           </a:p>
@@ -35986,7 +35635,7 @@
                 <a:ea typeface="Calibri" pitchFamily="34" charset="-122"/>
                 <a:cs typeface="Calibri" pitchFamily="34" charset="-120"/>
               </a:rPr>
-              <a:t>Word Labs  •  wordlabs.app  •  Suffix: '-ness' = state or quality of</a:t>
+              <a:t>Word Labs  •  wordlabs.app  •  Suffix: '-ness' = state or quality of being</a:t>
             </a:r>
             <a:endParaRPr lang="en-US" sz="800" dirty="0"/>
           </a:p>
@@ -36098,7 +35747,7 @@
                 <a:ea typeface="Calibri" pitchFamily="34" charset="-122"/>
                 <a:cs typeface="Calibri" pitchFamily="34" charset="-120"/>
               </a:rPr>
-              <a:t>1.  The suffix '-ness' turns adjectives into nouns.</a:t>
+              <a:t>1.  The suffix '-ness' can turn adjectives into nouns.</a:t>
             </a:r>
             <a:endParaRPr lang="en-US" sz="1300" dirty="0"/>
           </a:p>
@@ -36237,7 +35886,7 @@
                 <a:ea typeface="Calibri" pitchFamily="34" charset="-122"/>
                 <a:cs typeface="Calibri" pitchFamily="34" charset="-120"/>
               </a:rPr>
-              <a:t>2.  The suffix '-ness' comes from Latin.</a:t>
+              <a:t>2.  The suffix '-ness' changes the meaning of a word to mean 'without'.</a:t>
             </a:r>
             <a:endParaRPr lang="en-US" sz="1300" dirty="0"/>
           </a:p>
@@ -36376,7 +36025,7 @@
                 <a:ea typeface="Calibri" pitchFamily="34" charset="-122"/>
                 <a:cs typeface="Calibri" pitchFamily="34" charset="-120"/>
               </a:rPr>
-              <a:t>3.  Adding '-ness' to 'kind' makes the word 'kindness'.</a:t>
+              <a:t>3.  The word 'darkness' contains the suffix '-ness'.</a:t>
             </a:r>
             <a:endParaRPr lang="en-US" sz="1300" dirty="0"/>
           </a:p>
@@ -36515,7 +36164,7 @@
                 <a:ea typeface="Calibri" pitchFamily="34" charset="-122"/>
                 <a:cs typeface="Calibri" pitchFamily="34" charset="-120"/>
               </a:rPr>
-              <a:t>4.  Words ending in '-ness' describe a state or quality.</a:t>
+              <a:t>4.  Adding '-ness' to a word always makes it a verb.</a:t>
             </a:r>
             <a:endParaRPr lang="en-US" sz="1300" dirty="0"/>
           </a:p>
@@ -36538,11 +36187,11 @@
             </a:avLst>
           </a:prstGeom>
           <a:solidFill>
-            <a:srgbClr val="DCFCE7"/>
-          </a:solidFill>
-          <a:ln w="12700">
-            <a:solidFill>
-              <a:srgbClr val="16A34A"/>
+            <a:srgbClr val="FEE2E2"/>
+          </a:solidFill>
+          <a:ln w="12700">
+            <a:solidFill>
+              <a:srgbClr val="DC2626"/>
             </a:solidFill>
             <a:prstDash val="solid"/>
           </a:ln>
@@ -36575,13 +36224,13 @@
             <a:r>
               <a:rPr lang="en-US" sz="1100" b="1" dirty="0">
                 <a:solidFill>
-                  <a:srgbClr val="16A34A"/>
+                  <a:srgbClr val="DC2626"/>
                 </a:solidFill>
                 <a:latin typeface="Trebuchet MS" pitchFamily="34" charset="0"/>
                 <a:ea typeface="Trebuchet MS" pitchFamily="34" charset="-122"/>
                 <a:cs typeface="Trebuchet MS" pitchFamily="34" charset="-120"/>
               </a:rPr>
-              <a:t>TRUE</a:t>
+              <a:t>FALSE</a:t>
             </a:r>
             <a:endParaRPr lang="en-US" sz="1100" dirty="0"/>
           </a:p>
@@ -36654,7 +36303,7 @@
                 <a:ea typeface="Calibri" pitchFamily="34" charset="-122"/>
                 <a:cs typeface="Calibri" pitchFamily="34" charset="-120"/>
               </a:rPr>
-              <a:t>5.  The suffix '-ness' makes a word mean 'without something'.</a:t>
+              <a:t>5.  'Ness' comes from Old English.</a:t>
             </a:r>
             <a:endParaRPr lang="en-US" sz="1300" dirty="0"/>
           </a:p>
@@ -36677,11 +36326,11 @@
             </a:avLst>
           </a:prstGeom>
           <a:solidFill>
-            <a:srgbClr val="FEE2E2"/>
-          </a:solidFill>
-          <a:ln w="12700">
-            <a:solidFill>
-              <a:srgbClr val="DC2626"/>
+            <a:srgbClr val="DCFCE7"/>
+          </a:solidFill>
+          <a:ln w="12700">
+            <a:solidFill>
+              <a:srgbClr val="16A34A"/>
             </a:solidFill>
             <a:prstDash val="solid"/>
           </a:ln>
@@ -36714,13 +36363,13 @@
             <a:r>
               <a:rPr lang="en-US" sz="1100" b="1" dirty="0">
                 <a:solidFill>
-                  <a:srgbClr val="DC2626"/>
+                  <a:srgbClr val="16A34A"/>
                 </a:solidFill>
                 <a:latin typeface="Trebuchet MS" pitchFamily="34" charset="0"/>
                 <a:ea typeface="Trebuchet MS" pitchFamily="34" charset="-122"/>
                 <a:cs typeface="Trebuchet MS" pitchFamily="34" charset="-120"/>
               </a:rPr>
-              <a:t>FALSE</a:t>
+              <a:t>TRUE</a:t>
             </a:r>
             <a:endParaRPr lang="en-US" sz="1100" dirty="0"/>
           </a:p>
@@ -37012,7 +36661,7 @@
                 <a:ea typeface="Calibri" pitchFamily="34" charset="-122"/>
                 <a:cs typeface="Calibri" pitchFamily="34" charset="-120"/>
               </a:rPr>
-              <a:t>Word Labs  •  wordlabs.app  •  Suffix: '-ness' = state or quality of</a:t>
+              <a:t>Word Labs  •  wordlabs.app  •  Suffix: '-ness' = state or quality of being</a:t>
             </a:r>
             <a:endParaRPr lang="en-US" sz="800" dirty="0"/>
           </a:p>
@@ -37149,7 +36798,7 @@
                 <a:ea typeface="Trebuchet MS" pitchFamily="34" charset="-122"/>
                 <a:cs typeface="Trebuchet MS" pitchFamily="34" charset="-120"/>
               </a:rPr>
-              <a:t>state or quality of</a:t>
+              <a:t>state or quality of being</a:t>
             </a:r>
             <a:endParaRPr lang="en-US" sz="2000" dirty="0"/>
           </a:p>
@@ -37293,7 +36942,7 @@
                 <a:ea typeface="Trebuchet MS" pitchFamily="34" charset="-122"/>
                 <a:cs typeface="Trebuchet MS" pitchFamily="34" charset="-120"/>
               </a:rPr>
-              <a:t>happiness</a:t>
+              <a:t>kindness</a:t>
             </a:r>
             <a:endParaRPr lang="en-US" sz="1300" dirty="0"/>
           </a:p>
@@ -37359,7 +37008,7 @@
                 <a:ea typeface="Trebuchet MS" pitchFamily="34" charset="-122"/>
                 <a:cs typeface="Trebuchet MS" pitchFamily="34" charset="-120"/>
               </a:rPr>
-              <a:t>kindness</a:t>
+              <a:t>darkness</a:t>
             </a:r>
             <a:endParaRPr lang="en-US" sz="1300" dirty="0"/>
           </a:p>
@@ -37425,7 +37074,7 @@
                 <a:ea typeface="Trebuchet MS" pitchFamily="34" charset="-122"/>
                 <a:cs typeface="Trebuchet MS" pitchFamily="34" charset="-120"/>
               </a:rPr>
-              <a:t>darkness</a:t>
+              <a:t>happiness</a:t>
             </a:r>
             <a:endParaRPr lang="en-US" sz="1300" dirty="0"/>
           </a:p>
@@ -37491,7 +37140,7 @@
                 <a:ea typeface="Trebuchet MS" pitchFamily="34" charset="-122"/>
                 <a:cs typeface="Trebuchet MS" pitchFamily="34" charset="-120"/>
               </a:rPr>
-              <a:t>softness</a:t>
+              <a:t>sadness</a:t>
             </a:r>
             <a:endParaRPr lang="en-US" sz="1300" dirty="0"/>
           </a:p>
@@ -37557,7 +37206,7 @@
                 <a:ea typeface="Trebuchet MS" pitchFamily="34" charset="-122"/>
                 <a:cs typeface="Trebuchet MS" pitchFamily="34" charset="-120"/>
               </a:rPr>
-              <a:t>brightness</a:t>
+              <a:t>sickness</a:t>
             </a:r>
             <a:endParaRPr lang="en-US" sz="1300" dirty="0"/>
           </a:p>
@@ -37623,7 +37272,7 @@
                 <a:ea typeface="Trebuchet MS" pitchFamily="34" charset="-122"/>
                 <a:cs typeface="Trebuchet MS" pitchFamily="34" charset="-120"/>
               </a:rPr>
-              <a:t>sadness</a:t>
+              <a:t>softness</a:t>
             </a:r>
             <a:endParaRPr lang="en-US" sz="1300" dirty="0"/>
           </a:p>
@@ -37689,7 +37338,7 @@
                 <a:ea typeface="Trebuchet MS" pitchFamily="34" charset="-122"/>
                 <a:cs typeface="Trebuchet MS" pitchFamily="34" charset="-120"/>
               </a:rPr>
-              <a:t>illness</a:t>
+              <a:t>loudness</a:t>
             </a:r>
             <a:endParaRPr lang="en-US" sz="1300" dirty="0"/>
           </a:p>
@@ -37981,7 +37630,7 @@
                 <a:ea typeface="Calibri" pitchFamily="34" charset="-122"/>
                 <a:cs typeface="Calibri" pitchFamily="34" charset="-120"/>
               </a:rPr>
-              <a:t>Word Labs  •  wordlabs.app  •  Suffix: '-ness' = state or quality of</a:t>
+              <a:t>Word Labs  •  wordlabs.app  •  Suffix: '-ness' = state or quality of being</a:t>
             </a:r>
             <a:endParaRPr lang="en-US" sz="800" dirty="0"/>
           </a:p>
@@ -38474,7 +38123,7 @@
                 <a:ea typeface="Trebuchet MS" pitchFamily="34" charset="-122"/>
                 <a:cs typeface="Trebuchet MS" pitchFamily="34" charset="-120"/>
               </a:rPr>
-              <a:t>for-</a:t>
+              <a:t>kind-</a:t>
             </a:r>
             <a:endParaRPr lang="en-US" sz="1300" dirty="0"/>
           </a:p>
@@ -38627,7 +38276,7 @@
                 <a:ea typeface="Trebuchet MS" pitchFamily="34" charset="-122"/>
                 <a:cs typeface="Trebuchet MS" pitchFamily="34" charset="-120"/>
               </a:rPr>
-              <a:t>sick-</a:t>
+              <a:t>dark-</a:t>
             </a:r>
             <a:endParaRPr lang="en-US" sz="1300" dirty="0"/>
           </a:p>
@@ -38780,7 +38429,7 @@
                 <a:ea typeface="Trebuchet MS" pitchFamily="34" charset="-122"/>
                 <a:cs typeface="Trebuchet MS" pitchFamily="34" charset="-120"/>
               </a:rPr>
-              <a:t>dark-</a:t>
+              <a:t>sad-</a:t>
             </a:r>
             <a:endParaRPr lang="en-US" sz="1300" dirty="0"/>
           </a:p>
@@ -38844,7 +38493,7 @@
                 <a:ea typeface="Trebuchet MS" pitchFamily="34" charset="-122"/>
                 <a:cs typeface="Trebuchet MS" pitchFamily="34" charset="-120"/>
               </a:rPr>
-              <a:t>soft</a:t>
+              <a:t>sad</a:t>
             </a:r>
             <a:endParaRPr lang="en-US" sz="1300" dirty="0"/>
           </a:p>
@@ -38933,7 +38582,7 @@
                 <a:ea typeface="Trebuchet MS" pitchFamily="34" charset="-122"/>
                 <a:cs typeface="Trebuchet MS" pitchFamily="34" charset="-120"/>
               </a:rPr>
-              <a:t>kind-</a:t>
+              <a:t>sick-</a:t>
             </a:r>
             <a:endParaRPr lang="en-US" sz="1300" dirty="0"/>
           </a:p>
@@ -38997,7 +38646,7 @@
                 <a:ea typeface="Trebuchet MS" pitchFamily="34" charset="-122"/>
                 <a:cs typeface="Trebuchet MS" pitchFamily="34" charset="-120"/>
               </a:rPr>
-              <a:t>bright</a:t>
+              <a:t>sick</a:t>
             </a:r>
             <a:endParaRPr lang="en-US" sz="1300" dirty="0"/>
           </a:p>
@@ -39463,7 +39112,7 @@
                 <a:ea typeface="Trebuchet MS" pitchFamily="34" charset="-122"/>
                 <a:cs typeface="Trebuchet MS" pitchFamily="34" charset="-120"/>
               </a:rPr>
-              <a:t>happiness</a:t>
+              <a:t>kindness</a:t>
             </a:r>
             <a:endParaRPr lang="en-US" sz="1400" dirty="0"/>
           </a:p>
@@ -39755,7 +39404,7 @@
                 <a:ea typeface="Calibri" pitchFamily="34" charset="-122"/>
                 <a:cs typeface="Calibri" pitchFamily="34" charset="-120"/>
               </a:rPr>
-              <a:t>Word Labs  •  wordlabs.app  •  Suffix: '-ness' = state or quality of</a:t>
+              <a:t>Word Labs  •  wordlabs.app  •  Suffix: '-ness' = state or quality of being</a:t>
             </a:r>
             <a:endParaRPr lang="en-US" sz="800" dirty="0"/>
           </a:p>
@@ -39867,7 +39516,7 @@
                 <a:ea typeface="Trebuchet MS" pitchFamily="34" charset="-122"/>
                 <a:cs typeface="Trebuchet MS" pitchFamily="34" charset="-120"/>
               </a:rPr>
-              <a:t>happiness</a:t>
+              <a:t>kindness</a:t>
             </a:r>
             <a:endParaRPr lang="en-US" sz="1200" dirty="0"/>
           </a:p>
@@ -39933,7 +39582,7 @@
                 <a:ea typeface="Calibri" pitchFamily="34" charset="-122"/>
                 <a:cs typeface="Calibri" pitchFamily="34" charset="-120"/>
               </a:rPr>
-              <a:t>The feeling of being very happy and joyful.</a:t>
+              <a:t>The quality of being friendly, generous, and caring towards others.</a:t>
             </a:r>
             <a:endParaRPr lang="en-US" sz="1200" dirty="0"/>
           </a:p>
@@ -40006,7 +39655,7 @@
                 <a:ea typeface="Trebuchet MS" pitchFamily="34" charset="-122"/>
                 <a:cs typeface="Trebuchet MS" pitchFamily="34" charset="-120"/>
               </a:rPr>
-              <a:t>kindness</a:t>
+              <a:t>darkness</a:t>
             </a:r>
             <a:endParaRPr lang="en-US" sz="1200" dirty="0"/>
           </a:p>
@@ -40072,7 +39721,7 @@
                 <a:ea typeface="Calibri" pitchFamily="34" charset="-122"/>
                 <a:cs typeface="Calibri" pitchFamily="34" charset="-120"/>
               </a:rPr>
-              <a:t>The state of giving off or reflecting a lot of light.</a:t>
+              <a:t>The condition of being unwell or ill.</a:t>
             </a:r>
             <a:endParaRPr lang="en-US" sz="1200" dirty="0"/>
           </a:p>
@@ -40145,7 +39794,7 @@
                 <a:ea typeface="Trebuchet MS" pitchFamily="34" charset="-122"/>
                 <a:cs typeface="Trebuchet MS" pitchFamily="34" charset="-120"/>
               </a:rPr>
-              <a:t>darkness</a:t>
+              <a:t>happiness</a:t>
             </a:r>
             <a:endParaRPr lang="en-US" sz="1200" dirty="0"/>
           </a:p>
@@ -40211,7 +39860,7 @@
                 <a:ea typeface="Calibri" pitchFamily="34" charset="-122"/>
                 <a:cs typeface="Calibri" pitchFamily="34" charset="-120"/>
               </a:rPr>
-              <a:t>The quality of being gentle or smooth to touch.</a:t>
+              <a:t>The state of feeling unhappy or sorrowful.</a:t>
             </a:r>
             <a:endParaRPr lang="en-US" sz="1200" dirty="0"/>
           </a:p>
@@ -40284,7 +39933,7 @@
                 <a:ea typeface="Trebuchet MS" pitchFamily="34" charset="-122"/>
                 <a:cs typeface="Trebuchet MS" pitchFamily="34" charset="-120"/>
               </a:rPr>
-              <a:t>softness</a:t>
+              <a:t>sadness</a:t>
             </a:r>
             <a:endParaRPr lang="en-US" sz="1200" dirty="0"/>
           </a:p>
@@ -40350,7 +39999,7 @@
                 <a:ea typeface="Calibri" pitchFamily="34" charset="-122"/>
                 <a:cs typeface="Calibri" pitchFamily="34" charset="-120"/>
               </a:rPr>
-              <a:t>The feeling of being unhappy or upset.</a:t>
+              <a:t>The quality of being gentle or easy to touch.</a:t>
             </a:r>
             <a:endParaRPr lang="en-US" sz="1200" dirty="0"/>
           </a:p>
@@ -40423,7 +40072,7 @@
                 <a:ea typeface="Trebuchet MS" pitchFamily="34" charset="-122"/>
                 <a:cs typeface="Trebuchet MS" pitchFamily="34" charset="-120"/>
               </a:rPr>
-              <a:t>brightness</a:t>
+              <a:t>sickness</a:t>
             </a:r>
             <a:endParaRPr lang="en-US" sz="1200" dirty="0"/>
           </a:p>
@@ -40489,7 +40138,7 @@
                 <a:ea typeface="Calibri" pitchFamily="34" charset="-122"/>
                 <a:cs typeface="Calibri" pitchFamily="34" charset="-120"/>
               </a:rPr>
-              <a:t>The state of having no light; being dark.</a:t>
+              <a:t>The feeling of being very glad or joyful.</a:t>
             </a:r>
             <a:endParaRPr lang="en-US" sz="1200" dirty="0"/>
           </a:p>
@@ -40562,7 +40211,7 @@
                 <a:ea typeface="Trebuchet MS" pitchFamily="34" charset="-122"/>
                 <a:cs typeface="Trebuchet MS" pitchFamily="34" charset="-120"/>
               </a:rPr>
-              <a:t>sadness</a:t>
+              <a:t>softness</a:t>
             </a:r>
             <a:endParaRPr lang="en-US" sz="1200" dirty="0"/>
           </a:p>
@@ -40628,7 +40277,7 @@
                 <a:ea typeface="Calibri" pitchFamily="34" charset="-122"/>
                 <a:cs typeface="Calibri" pitchFamily="34" charset="-120"/>
               </a:rPr>
-              <a:t>The state of being sick or unwell.</a:t>
+              <a:t>The quality of making a lot of noise or sound.</a:t>
             </a:r>
             <a:endParaRPr lang="en-US" sz="1200" dirty="0"/>
           </a:p>
@@ -40701,7 +40350,7 @@
                 <a:ea typeface="Trebuchet MS" pitchFamily="34" charset="-122"/>
                 <a:cs typeface="Trebuchet MS" pitchFamily="34" charset="-120"/>
               </a:rPr>
-              <a:t>illness</a:t>
+              <a:t>loudness</a:t>
             </a:r>
             <a:endParaRPr lang="en-US" sz="1200" dirty="0"/>
           </a:p>
@@ -40767,7 +40416,7 @@
                 <a:ea typeface="Calibri" pitchFamily="34" charset="-122"/>
                 <a:cs typeface="Calibri" pitchFamily="34" charset="-120"/>
               </a:rPr>
-              <a:t>The quality of being caring and generous to others.</a:t>
+              <a:t>The state of having no light or very little light.</a:t>
             </a:r>
             <a:endParaRPr lang="en-US" sz="1200" dirty="0"/>
           </a:p>
@@ -41059,7 +40708,7 @@
                 <a:ea typeface="Calibri" pitchFamily="34" charset="-122"/>
                 <a:cs typeface="Calibri" pitchFamily="34" charset="-120"/>
               </a:rPr>
-              <a:t>Word Labs  •  wordlabs.app  •  Suffix: '-ness' = state or quality of</a:t>
+              <a:t>Word Labs  •  wordlabs.app  •  Suffix: '-ness' = state or quality of being</a:t>
             </a:r>
             <a:endParaRPr lang="en-US" sz="800" dirty="0"/>
           </a:p>
@@ -41262,7 +40911,7 @@
                 <a:ea typeface="Calibri" pitchFamily="34" charset="-122"/>
                 <a:cs typeface="Calibri" pitchFamily="34" charset="-120"/>
               </a:rPr>
-              <a:t>The kindness she showed her classmates made everyone feel welcome.</a:t>
+              <a:t>The kindness of the teacher made all the students feel welcome on their first day.</a:t>
             </a:r>
             <a:endParaRPr lang="en-US" sz="1500" dirty="0"/>
           </a:p>
@@ -41426,7 +41075,7 @@
                 <a:ea typeface="Calibri" pitchFamily="34" charset="-122"/>
                 <a:cs typeface="Calibri" pitchFamily="34" charset="-120"/>
               </a:rPr>
-              <a:t>After the storm, a strange darkness covered the whole sky.</a:t>
+              <a:t>A great stillness fell over the classroom as everyone concentrated on the test.</a:t>
             </a:r>
             <a:endParaRPr lang="en-US" sz="1500" dirty="0"/>
           </a:p>
@@ -41590,7 +41239,7 @@
                 <a:ea typeface="Calibri" pitchFamily="34" charset="-122"/>
                 <a:cs typeface="Calibri" pitchFamily="34" charset="-120"/>
               </a:rPr>
-              <a:t>The softness of the puppy's fur made it lovely to cuddle.</a:t>
+              <a:t>The darkness of the cave made it hard to see without a torch.</a:t>
             </a:r>
             <a:endParaRPr lang="en-US" sz="1500" dirty="0"/>
           </a:p>
